--- a/output/wordlabs-duc-3day.pptx
+++ b/output/wordlabs-duc-3day.pptx
@@ -5622,7 +5622,7 @@
                 <a:ea typeface="Trebuchet MS" pitchFamily="34" charset="-122"/>
                 <a:cs typeface="Trebuchet MS" pitchFamily="34" charset="-120"/>
               </a:rPr>
-              <a:t>0</a:t>
+              <a:t>1</a:t>
             </a:r>
             <a:pPr algn="ctr" indent="0" marL="0">
               <a:buNone/>
@@ -6071,7 +6071,7 @@
                 <a:ea typeface="Calibri" pitchFamily="34" charset="-122"/>
                 <a:cs typeface="Calibri" pitchFamily="34" charset="-120"/>
               </a:rPr>
-              <a:t> the new student and </a:t>
+              <a:t> the topic, then the students will </a:t>
             </a:r>
             <a:pPr algn="l" indent="0" marL="0">
               <a:buNone/>
@@ -6102,7 +6102,7 @@
                 <a:ea typeface="Calibri" pitchFamily="34" charset="-122"/>
                 <a:cs typeface="Calibri" pitchFamily="34" charset="-120"/>
               </a:rPr>
-              <a:t> a welcome poster for the class.</a:t>
+              <a:t> a poster about it.</a:t>
             </a:r>
             <a:endParaRPr lang="en-US" sz="1800" dirty="0"/>
           </a:p>
@@ -18249,7 +18249,7 @@
                 <a:ea typeface="Calibri" pitchFamily="34" charset="-122"/>
                 <a:cs typeface="Calibri" pitchFamily="34" charset="-120"/>
               </a:rPr>
-              <a:t>The principal will </a:t>
+              <a:t>Doctors can </a:t>
             </a:r>
             <a:pPr algn="l" indent="0" marL="0">
               <a:buNone/>
@@ -18266,7 +18266,7 @@
                 <a:ea typeface="Calibri" pitchFamily="34" charset="-122"/>
                 <a:cs typeface="Calibri" pitchFamily="34" charset="-120"/>
               </a:rPr>
-              <a:t>conduct</a:t>
+              <a:t>deduce</a:t>
             </a:r>
             <a:pPr algn="l" indent="0" marL="0">
               <a:buNone/>
@@ -18280,7 +18280,7 @@
                 <a:ea typeface="Calibri" pitchFamily="34" charset="-122"/>
                 <a:cs typeface="Calibri" pitchFamily="34" charset="-120"/>
               </a:rPr>
-              <a:t> the assembly, </a:t>
+              <a:t> a lot from your symptoms; good </a:t>
             </a:r>
             <a:pPr algn="l" indent="0" marL="0">
               <a:buNone/>
@@ -18297,7 +18297,7 @@
                 <a:ea typeface="Calibri" pitchFamily="34" charset="-122"/>
                 <a:cs typeface="Calibri" pitchFamily="34" charset="-120"/>
               </a:rPr>
-              <a:t>introduce</a:t>
+              <a:t>education</a:t>
             </a:r>
             <a:pPr algn="l" indent="0" marL="0">
               <a:buNone/>
@@ -18311,7 +18311,7 @@
                 <a:ea typeface="Calibri" pitchFamily="34" charset="-122"/>
                 <a:cs typeface="Calibri" pitchFamily="34" charset="-120"/>
               </a:rPr>
-              <a:t> the award winners, and then </a:t>
+              <a:t> helps us </a:t>
             </a:r>
             <a:pPr algn="l" indent="0" marL="0">
               <a:buNone/>
@@ -18342,7 +18342,7 @@
                 <a:ea typeface="Calibri" pitchFamily="34" charset="-122"/>
                 <a:cs typeface="Calibri" pitchFamily="34" charset="-120"/>
               </a:rPr>
-              <a:t> the time spent on notices.</a:t>
+              <a:t> mistakes in life.</a:t>
             </a:r>
             <a:endParaRPr lang="en-US" sz="1800" dirty="0"/>
           </a:p>
@@ -18497,7 +18497,7 @@
                 <a:ea typeface="Trebuchet MS" pitchFamily="34" charset="-122"/>
                 <a:cs typeface="Trebuchet MS" pitchFamily="34" charset="-120"/>
               </a:rPr>
-              <a:t>conduct</a:t>
+              <a:t>deduce</a:t>
             </a:r>
             <a:endParaRPr lang="en-US" sz="1400" dirty="0"/>
           </a:p>
@@ -18625,7 +18625,7 @@
                 <a:ea typeface="Trebuchet MS" pitchFamily="34" charset="-122"/>
                 <a:cs typeface="Trebuchet MS" pitchFamily="34" charset="-120"/>
               </a:rPr>
-              <a:t>introduce</a:t>
+              <a:t>education</a:t>
             </a:r>
             <a:endParaRPr lang="en-US" sz="1400" dirty="0"/>
           </a:p>
@@ -19223,7 +19223,7 @@
                 <a:ea typeface="Trebuchet MS" pitchFamily="34" charset="-122"/>
                 <a:cs typeface="Trebuchet MS" pitchFamily="34" charset="-120"/>
               </a:rPr>
-              <a:t>conduct</a:t>
+              <a:t>deduce</a:t>
             </a:r>
             <a:endParaRPr lang="en-US" sz="2800" dirty="0"/>
           </a:p>
@@ -20050,7 +20050,7 @@
                 <a:ea typeface="Trebuchet MS" pitchFamily="34" charset="-122"/>
                 <a:cs typeface="Trebuchet MS" pitchFamily="34" charset="-120"/>
               </a:rPr>
-              <a:t>conduct</a:t>
+              <a:t>deduce</a:t>
             </a:r>
             <a:endParaRPr lang="en-US" sz="2800" dirty="0"/>
           </a:p>
@@ -20189,7 +20189,7 @@
                 <a:ea typeface="Trebuchet MS" pitchFamily="34" charset="-122"/>
                 <a:cs typeface="Trebuchet MS" pitchFamily="34" charset="-120"/>
               </a:rPr>
-              <a:t>con</a:t>
+              <a:t>de</a:t>
             </a:r>
             <a:endParaRPr lang="en-US" sz="1300" dirty="0"/>
           </a:p>
@@ -20228,7 +20228,7 @@
                 <a:ea typeface="Calibri" pitchFamily="34" charset="-122"/>
                 <a:cs typeface="Calibri" pitchFamily="34" charset="-120"/>
               </a:rPr>
-              <a:t>together, with</a:t>
+              <a:t>down, away from</a:t>
             </a:r>
             <a:endParaRPr lang="en-US" sz="850" dirty="0"/>
           </a:p>
@@ -20413,7 +20413,7 @@
                 <a:ea typeface="Trebuchet MS" pitchFamily="34" charset="-122"/>
                 <a:cs typeface="Trebuchet MS" pitchFamily="34" charset="-120"/>
               </a:rPr>
-              <a:t>t</a:t>
+              <a:t>e</a:t>
             </a:r>
             <a:endParaRPr lang="en-US" sz="1300" dirty="0"/>
           </a:p>
@@ -20452,7 +20452,7 @@
                 <a:ea typeface="Calibri" pitchFamily="34" charset="-122"/>
                 <a:cs typeface="Calibri" pitchFamily="34" charset="-120"/>
               </a:rPr>
-              <a:t>verb-forming ending</a:t>
+              <a:t>verb-forming suffix</a:t>
             </a:r>
             <a:endParaRPr lang="en-US" sz="850" dirty="0"/>
           </a:p>
@@ -21147,7 +21147,7 @@
                 <a:ea typeface="Trebuchet MS" pitchFamily="34" charset="-122"/>
                 <a:cs typeface="Trebuchet MS" pitchFamily="34" charset="-120"/>
               </a:rPr>
-              <a:t>conduct</a:t>
+              <a:t>deduce</a:t>
             </a:r>
             <a:endParaRPr lang="en-US" sz="2800" dirty="0"/>
           </a:p>
@@ -21286,7 +21286,7 @@
                 <a:ea typeface="Trebuchet MS" pitchFamily="34" charset="-122"/>
                 <a:cs typeface="Trebuchet MS" pitchFamily="34" charset="-120"/>
               </a:rPr>
-              <a:t>con</a:t>
+              <a:t>de</a:t>
             </a:r>
             <a:endParaRPr lang="en-US" sz="1300" dirty="0"/>
           </a:p>
@@ -21325,7 +21325,7 @@
                 <a:ea typeface="Calibri" pitchFamily="34" charset="-122"/>
                 <a:cs typeface="Calibri" pitchFamily="34" charset="-120"/>
               </a:rPr>
-              <a:t>together, with</a:t>
+              <a:t>down, away from</a:t>
             </a:r>
             <a:endParaRPr lang="en-US" sz="850" dirty="0"/>
           </a:p>
@@ -21510,7 +21510,7 @@
                 <a:ea typeface="Trebuchet MS" pitchFamily="34" charset="-122"/>
                 <a:cs typeface="Trebuchet MS" pitchFamily="34" charset="-120"/>
               </a:rPr>
-              <a:t>t</a:t>
+              <a:t>e</a:t>
             </a:r>
             <a:endParaRPr lang="en-US" sz="1300" dirty="0"/>
           </a:p>
@@ -21549,7 +21549,7 @@
                 <a:ea typeface="Calibri" pitchFamily="34" charset="-122"/>
                 <a:cs typeface="Calibri" pitchFamily="34" charset="-120"/>
               </a:rPr>
-              <a:t>verb-forming ending</a:t>
+              <a:t>verb-forming suffix</a:t>
             </a:r>
             <a:endParaRPr lang="en-US" sz="850" dirty="0"/>
           </a:p>
@@ -21708,7 +21708,7 @@
                 <a:ea typeface="Trebuchet MS" pitchFamily="34" charset="-122"/>
                 <a:cs typeface="Trebuchet MS" pitchFamily="34" charset="-120"/>
               </a:rPr>
-              <a:t>con</a:t>
+              <a:t>de</a:t>
             </a:r>
             <a:endParaRPr lang="en-US" sz="1400" dirty="0"/>
           </a:p>
@@ -21813,7 +21813,7 @@
                 <a:ea typeface="Trebuchet MS" pitchFamily="34" charset="-122"/>
                 <a:cs typeface="Trebuchet MS" pitchFamily="34" charset="-120"/>
               </a:rPr>
-              <a:t>duct</a:t>
+              <a:t>duce</a:t>
             </a:r>
             <a:endParaRPr lang="en-US" sz="1400" dirty="0"/>
           </a:p>
@@ -22376,7 +22376,7 @@
                 <a:ea typeface="Trebuchet MS" pitchFamily="34" charset="-122"/>
                 <a:cs typeface="Trebuchet MS" pitchFamily="34" charset="-120"/>
               </a:rPr>
-              <a:t>conduct</a:t>
+              <a:t>deduce</a:t>
             </a:r>
             <a:endParaRPr lang="en-US" sz="2800" dirty="0"/>
           </a:p>
@@ -22515,7 +22515,7 @@
                 <a:ea typeface="Trebuchet MS" pitchFamily="34" charset="-122"/>
                 <a:cs typeface="Trebuchet MS" pitchFamily="34" charset="-120"/>
               </a:rPr>
-              <a:t>con</a:t>
+              <a:t>de</a:t>
             </a:r>
             <a:endParaRPr lang="en-US" sz="1300" dirty="0"/>
           </a:p>
@@ -22554,7 +22554,7 @@
                 <a:ea typeface="Calibri" pitchFamily="34" charset="-122"/>
                 <a:cs typeface="Calibri" pitchFamily="34" charset="-120"/>
               </a:rPr>
-              <a:t>together, with</a:t>
+              <a:t>down, away from</a:t>
             </a:r>
             <a:endParaRPr lang="en-US" sz="850" dirty="0"/>
           </a:p>
@@ -22739,7 +22739,7 @@
                 <a:ea typeface="Trebuchet MS" pitchFamily="34" charset="-122"/>
                 <a:cs typeface="Trebuchet MS" pitchFamily="34" charset="-120"/>
               </a:rPr>
-              <a:t>t</a:t>
+              <a:t>e</a:t>
             </a:r>
             <a:endParaRPr lang="en-US" sz="1300" dirty="0"/>
           </a:p>
@@ -22778,7 +22778,7 @@
                 <a:ea typeface="Calibri" pitchFamily="34" charset="-122"/>
                 <a:cs typeface="Calibri" pitchFamily="34" charset="-120"/>
               </a:rPr>
-              <a:t>verb-forming ending</a:t>
+              <a:t>verb-forming suffix</a:t>
             </a:r>
             <a:endParaRPr lang="en-US" sz="850" dirty="0"/>
           </a:p>
@@ -22937,7 +22937,7 @@
                 <a:ea typeface="Trebuchet MS" pitchFamily="34" charset="-122"/>
                 <a:cs typeface="Trebuchet MS" pitchFamily="34" charset="-120"/>
               </a:rPr>
-              <a:t>con</a:t>
+              <a:t>de</a:t>
             </a:r>
             <a:endParaRPr lang="en-US" sz="1400" dirty="0"/>
           </a:p>
@@ -23042,7 +23042,7 @@
                 <a:ea typeface="Trebuchet MS" pitchFamily="34" charset="-122"/>
                 <a:cs typeface="Trebuchet MS" pitchFamily="34" charset="-120"/>
               </a:rPr>
-              <a:t>duct</a:t>
+              <a:t>duce</a:t>
             </a:r>
             <a:endParaRPr lang="en-US" sz="1400" dirty="0"/>
           </a:p>
@@ -23149,7 +23149,7 @@
         </p:nvSpPr>
         <p:spPr>
           <a:xfrm>
-            <a:off x="2124837" y="4169664"/>
+            <a:off x="2427732" y="4169664"/>
             <a:ext cx="685800" cy="384048"/>
           </a:xfrm>
           <a:prstGeom prst="rect">
@@ -23176,7 +23176,7 @@
         </p:nvSpPr>
         <p:spPr>
           <a:xfrm>
-            <a:off x="2124837" y="4169664"/>
+            <a:off x="2427732" y="4169664"/>
             <a:ext cx="685800" cy="384048"/>
           </a:xfrm>
           <a:prstGeom prst="rect">
@@ -23201,7 +23201,7 @@
                 <a:ea typeface="Trebuchet MS" pitchFamily="34" charset="-122"/>
                 <a:cs typeface="Trebuchet MS" pitchFamily="34" charset="-120"/>
               </a:rPr>
-              <a:t>c</a:t>
+              <a:t>d</a:t>
             </a:r>
             <a:endParaRPr lang="en-US" sz="900" dirty="0"/>
           </a:p>
@@ -23209,13 +23209,277 @@
       </p:sp>
       <p:sp>
         <p:nvSpPr>
-          <p:cNvPr id="38" name="Text 36"/>
-          <p:cNvSpPr/>
-          <p:nvPr/>
-        </p:nvSpPr>
-        <p:spPr>
-          <a:xfrm>
-            <a:off x="2124837" y="4572000"/>
+          <p:cNvPr id="38" name="Shape 36"/>
+          <p:cNvSpPr/>
+          <p:nvPr/>
+        </p:nvSpPr>
+        <p:spPr>
+          <a:xfrm>
+            <a:off x="3639312" y="4169664"/>
+            <a:ext cx="685800" cy="384048"/>
+          </a:xfrm>
+          <a:prstGeom prst="rect">
+            <a:avLst>
+              <a:gd name="adj" fmla="val 9524"/>
+            </a:avLst>
+          </a:prstGeom>
+          <a:solidFill>
+            <a:srgbClr val="FFFFFF"/>
+          </a:solidFill>
+          <a:ln w="12700">
+            <a:solidFill>
+              <a:srgbClr val="DB2777"/>
+            </a:solidFill>
+            <a:prstDash val="solid"/>
+          </a:ln>
+        </p:spPr>
+      </p:sp>
+      <p:sp>
+        <p:nvSpPr>
+          <p:cNvPr id="39" name="Text 37"/>
+          <p:cNvSpPr/>
+          <p:nvPr/>
+        </p:nvSpPr>
+        <p:spPr>
+          <a:xfrm>
+            <a:off x="3639312" y="4169664"/>
+            <a:ext cx="685800" cy="384048"/>
+          </a:xfrm>
+          <a:prstGeom prst="rect">
+            <a:avLst/>
+          </a:prstGeom>
+          <a:noFill/>
+          <a:ln/>
+        </p:spPr>
+        <p:txBody>
+          <a:bodyPr wrap="square" lIns="0" tIns="0" rIns="0" bIns="0" rtlCol="0" anchor="ctr"/>
+          <a:lstStyle/>
+          <a:p>
+            <a:pPr algn="ctr" indent="0" marL="0">
+              <a:buNone/>
+            </a:pPr>
+            <a:r>
+              <a:rPr lang="en-US" sz="900" b="1" dirty="0">
+                <a:solidFill>
+                  <a:srgbClr val="9D174D"/>
+                </a:solidFill>
+                <a:latin typeface="Trebuchet MS" pitchFamily="34" charset="0"/>
+                <a:ea typeface="Trebuchet MS" pitchFamily="34" charset="-122"/>
+                <a:cs typeface="Trebuchet MS" pitchFamily="34" charset="-120"/>
+              </a:rPr>
+              <a:t>e</a:t>
+            </a:r>
+            <a:endParaRPr lang="en-US" sz="900" dirty="0"/>
+          </a:p>
+        </p:txBody>
+      </p:sp>
+      <p:sp>
+        <p:nvSpPr>
+          <p:cNvPr id="40" name="Shape 38"/>
+          <p:cNvSpPr/>
+          <p:nvPr/>
+        </p:nvSpPr>
+        <p:spPr>
+          <a:xfrm>
+            <a:off x="4850892" y="4169664"/>
+            <a:ext cx="685800" cy="384048"/>
+          </a:xfrm>
+          <a:prstGeom prst="rect">
+            <a:avLst>
+              <a:gd name="adj" fmla="val 9524"/>
+            </a:avLst>
+          </a:prstGeom>
+          <a:solidFill>
+            <a:srgbClr val="FFFFFF"/>
+          </a:solidFill>
+          <a:ln w="12700">
+            <a:solidFill>
+              <a:srgbClr val="DB2777"/>
+            </a:solidFill>
+            <a:prstDash val="solid"/>
+          </a:ln>
+        </p:spPr>
+      </p:sp>
+      <p:sp>
+        <p:nvSpPr>
+          <p:cNvPr id="41" name="Text 39"/>
+          <p:cNvSpPr/>
+          <p:nvPr/>
+        </p:nvSpPr>
+        <p:spPr>
+          <a:xfrm>
+            <a:off x="4850892" y="4169664"/>
+            <a:ext cx="685800" cy="384048"/>
+          </a:xfrm>
+          <a:prstGeom prst="rect">
+            <a:avLst/>
+          </a:prstGeom>
+          <a:noFill/>
+          <a:ln/>
+        </p:spPr>
+        <p:txBody>
+          <a:bodyPr wrap="square" lIns="0" tIns="0" rIns="0" bIns="0" rtlCol="0" anchor="ctr"/>
+          <a:lstStyle/>
+          <a:p>
+            <a:pPr algn="ctr" indent="0" marL="0">
+              <a:buNone/>
+            </a:pPr>
+            <a:r>
+              <a:rPr lang="en-US" sz="900" b="1" dirty="0">
+                <a:solidFill>
+                  <a:srgbClr val="9D174D"/>
+                </a:solidFill>
+                <a:latin typeface="Trebuchet MS" pitchFamily="34" charset="0"/>
+                <a:ea typeface="Trebuchet MS" pitchFamily="34" charset="-122"/>
+                <a:cs typeface="Trebuchet MS" pitchFamily="34" charset="-120"/>
+              </a:rPr>
+              <a:t>d</a:t>
+            </a:r>
+            <a:endParaRPr lang="en-US" sz="900" dirty="0"/>
+          </a:p>
+        </p:txBody>
+      </p:sp>
+      <p:sp>
+        <p:nvSpPr>
+          <p:cNvPr id="42" name="Shape 40"/>
+          <p:cNvSpPr/>
+          <p:nvPr/>
+        </p:nvSpPr>
+        <p:spPr>
+          <a:xfrm>
+            <a:off x="6062472" y="4169664"/>
+            <a:ext cx="685800" cy="384048"/>
+          </a:xfrm>
+          <a:prstGeom prst="rect">
+            <a:avLst>
+              <a:gd name="adj" fmla="val 9524"/>
+            </a:avLst>
+          </a:prstGeom>
+          <a:solidFill>
+            <a:srgbClr val="FFFFFF"/>
+          </a:solidFill>
+          <a:ln w="12700">
+            <a:solidFill>
+              <a:srgbClr val="DB2777"/>
+            </a:solidFill>
+            <a:prstDash val="solid"/>
+          </a:ln>
+        </p:spPr>
+      </p:sp>
+      <p:sp>
+        <p:nvSpPr>
+          <p:cNvPr id="43" name="Text 41"/>
+          <p:cNvSpPr/>
+          <p:nvPr/>
+        </p:nvSpPr>
+        <p:spPr>
+          <a:xfrm>
+            <a:off x="6062472" y="4169664"/>
+            <a:ext cx="685800" cy="384048"/>
+          </a:xfrm>
+          <a:prstGeom prst="rect">
+            <a:avLst/>
+          </a:prstGeom>
+          <a:noFill/>
+          <a:ln/>
+        </p:spPr>
+        <p:txBody>
+          <a:bodyPr wrap="square" lIns="0" tIns="0" rIns="0" bIns="0" rtlCol="0" anchor="ctr"/>
+          <a:lstStyle/>
+          <a:p>
+            <a:pPr algn="ctr" indent="0" marL="0">
+              <a:buNone/>
+            </a:pPr>
+            <a:r>
+              <a:rPr lang="en-US" sz="900" b="1" dirty="0">
+                <a:solidFill>
+                  <a:srgbClr val="9D174D"/>
+                </a:solidFill>
+                <a:latin typeface="Trebuchet MS" pitchFamily="34" charset="0"/>
+                <a:ea typeface="Trebuchet MS" pitchFamily="34" charset="-122"/>
+                <a:cs typeface="Trebuchet MS" pitchFamily="34" charset="-120"/>
+              </a:rPr>
+              <a:t>u</a:t>
+            </a:r>
+            <a:endParaRPr lang="en-US" sz="900" dirty="0"/>
+          </a:p>
+        </p:txBody>
+      </p:sp>
+      <p:sp>
+        <p:nvSpPr>
+          <p:cNvPr id="44" name="Shape 42"/>
+          <p:cNvSpPr/>
+          <p:nvPr/>
+        </p:nvSpPr>
+        <p:spPr>
+          <a:xfrm>
+            <a:off x="7274052" y="4169664"/>
+            <a:ext cx="685800" cy="384048"/>
+          </a:xfrm>
+          <a:prstGeom prst="rect">
+            <a:avLst>
+              <a:gd name="adj" fmla="val 9524"/>
+            </a:avLst>
+          </a:prstGeom>
+          <a:solidFill>
+            <a:srgbClr val="FFFFFF"/>
+          </a:solidFill>
+          <a:ln w="12700">
+            <a:solidFill>
+              <a:srgbClr val="DB2777"/>
+            </a:solidFill>
+            <a:prstDash val="solid"/>
+          </a:ln>
+        </p:spPr>
+      </p:sp>
+      <p:sp>
+        <p:nvSpPr>
+          <p:cNvPr id="45" name="Text 43"/>
+          <p:cNvSpPr/>
+          <p:nvPr/>
+        </p:nvSpPr>
+        <p:spPr>
+          <a:xfrm>
+            <a:off x="7274052" y="4169664"/>
+            <a:ext cx="685800" cy="384048"/>
+          </a:xfrm>
+          <a:prstGeom prst="rect">
+            <a:avLst/>
+          </a:prstGeom>
+          <a:noFill/>
+          <a:ln/>
+        </p:spPr>
+        <p:txBody>
+          <a:bodyPr wrap="square" lIns="0" tIns="0" rIns="0" bIns="0" rtlCol="0" anchor="ctr"/>
+          <a:lstStyle/>
+          <a:p>
+            <a:pPr algn="ctr" indent="0" marL="0">
+              <a:buNone/>
+            </a:pPr>
+            <a:r>
+              <a:rPr lang="en-US" sz="900" b="1" dirty="0">
+                <a:solidFill>
+                  <a:srgbClr val="9D174D"/>
+                </a:solidFill>
+                <a:latin typeface="Trebuchet MS" pitchFamily="34" charset="0"/>
+                <a:ea typeface="Trebuchet MS" pitchFamily="34" charset="-122"/>
+                <a:cs typeface="Trebuchet MS" pitchFamily="34" charset="-120"/>
+              </a:rPr>
+              <a:t>ce</a:t>
+            </a:r>
+            <a:endParaRPr lang="en-US" sz="900" dirty="0"/>
+          </a:p>
+        </p:txBody>
+      </p:sp>
+      <p:sp>
+        <p:nvSpPr>
+          <p:cNvPr id="46" name="Text 44"/>
+          <p:cNvSpPr/>
+          <p:nvPr/>
+        </p:nvSpPr>
+        <p:spPr>
+          <a:xfrm>
+            <a:off x="7274052" y="4572000"/>
             <a:ext cx="685800" cy="219456"/>
           </a:xfrm>
           <a:prstGeom prst="rect">
@@ -23240,444 +23504,9 @@
                 <a:ea typeface="Calibri" pitchFamily="34" charset="-122"/>
                 <a:cs typeface="Calibri" pitchFamily="34" charset="-120"/>
               </a:rPr>
-              <a:t>/k/</a:t>
+              <a:t>/s/</a:t>
             </a:r>
             <a:endParaRPr lang="en-US" sz="750" dirty="0"/>
-          </a:p>
-        </p:txBody>
-      </p:sp>
-      <p:sp>
-        <p:nvSpPr>
-          <p:cNvPr id="39" name="Shape 37"/>
-          <p:cNvSpPr/>
-          <p:nvPr/>
-        </p:nvSpPr>
-        <p:spPr>
-          <a:xfrm>
-            <a:off x="3033522" y="4169664"/>
-            <a:ext cx="685800" cy="384048"/>
-          </a:xfrm>
-          <a:prstGeom prst="rect">
-            <a:avLst>
-              <a:gd name="adj" fmla="val 9524"/>
-            </a:avLst>
-          </a:prstGeom>
-          <a:solidFill>
-            <a:srgbClr val="FFFFFF"/>
-          </a:solidFill>
-          <a:ln w="12700">
-            <a:solidFill>
-              <a:srgbClr val="DB2777"/>
-            </a:solidFill>
-            <a:prstDash val="solid"/>
-          </a:ln>
-        </p:spPr>
-      </p:sp>
-      <p:sp>
-        <p:nvSpPr>
-          <p:cNvPr id="40" name="Text 38"/>
-          <p:cNvSpPr/>
-          <p:nvPr/>
-        </p:nvSpPr>
-        <p:spPr>
-          <a:xfrm>
-            <a:off x="3033522" y="4169664"/>
-            <a:ext cx="685800" cy="384048"/>
-          </a:xfrm>
-          <a:prstGeom prst="rect">
-            <a:avLst/>
-          </a:prstGeom>
-          <a:noFill/>
-          <a:ln/>
-        </p:spPr>
-        <p:txBody>
-          <a:bodyPr wrap="square" lIns="0" tIns="0" rIns="0" bIns="0" rtlCol="0" anchor="ctr"/>
-          <a:lstStyle/>
-          <a:p>
-            <a:pPr algn="ctr" indent="0" marL="0">
-              <a:buNone/>
-            </a:pPr>
-            <a:r>
-              <a:rPr lang="en-US" sz="900" b="1" dirty="0">
-                <a:solidFill>
-                  <a:srgbClr val="9D174D"/>
-                </a:solidFill>
-                <a:latin typeface="Trebuchet MS" pitchFamily="34" charset="0"/>
-                <a:ea typeface="Trebuchet MS" pitchFamily="34" charset="-122"/>
-                <a:cs typeface="Trebuchet MS" pitchFamily="34" charset="-120"/>
-              </a:rPr>
-              <a:t>o</a:t>
-            </a:r>
-            <a:endParaRPr lang="en-US" sz="900" dirty="0"/>
-          </a:p>
-        </p:txBody>
-      </p:sp>
-      <p:sp>
-        <p:nvSpPr>
-          <p:cNvPr id="41" name="Shape 39"/>
-          <p:cNvSpPr/>
-          <p:nvPr/>
-        </p:nvSpPr>
-        <p:spPr>
-          <a:xfrm>
-            <a:off x="3942207" y="4169664"/>
-            <a:ext cx="685800" cy="384048"/>
-          </a:xfrm>
-          <a:prstGeom prst="rect">
-            <a:avLst>
-              <a:gd name="adj" fmla="val 9524"/>
-            </a:avLst>
-          </a:prstGeom>
-          <a:solidFill>
-            <a:srgbClr val="FFFFFF"/>
-          </a:solidFill>
-          <a:ln w="12700">
-            <a:solidFill>
-              <a:srgbClr val="DB2777"/>
-            </a:solidFill>
-            <a:prstDash val="solid"/>
-          </a:ln>
-        </p:spPr>
-      </p:sp>
-      <p:sp>
-        <p:nvSpPr>
-          <p:cNvPr id="42" name="Text 40"/>
-          <p:cNvSpPr/>
-          <p:nvPr/>
-        </p:nvSpPr>
-        <p:spPr>
-          <a:xfrm>
-            <a:off x="3942207" y="4169664"/>
-            <a:ext cx="685800" cy="384048"/>
-          </a:xfrm>
-          <a:prstGeom prst="rect">
-            <a:avLst/>
-          </a:prstGeom>
-          <a:noFill/>
-          <a:ln/>
-        </p:spPr>
-        <p:txBody>
-          <a:bodyPr wrap="square" lIns="0" tIns="0" rIns="0" bIns="0" rtlCol="0" anchor="ctr"/>
-          <a:lstStyle/>
-          <a:p>
-            <a:pPr algn="ctr" indent="0" marL="0">
-              <a:buNone/>
-            </a:pPr>
-            <a:r>
-              <a:rPr lang="en-US" sz="900" b="1" dirty="0">
-                <a:solidFill>
-                  <a:srgbClr val="9D174D"/>
-                </a:solidFill>
-                <a:latin typeface="Trebuchet MS" pitchFamily="34" charset="0"/>
-                <a:ea typeface="Trebuchet MS" pitchFamily="34" charset="-122"/>
-                <a:cs typeface="Trebuchet MS" pitchFamily="34" charset="-120"/>
-              </a:rPr>
-              <a:t>n</a:t>
-            </a:r>
-            <a:endParaRPr lang="en-US" sz="900" dirty="0"/>
-          </a:p>
-        </p:txBody>
-      </p:sp>
-      <p:sp>
-        <p:nvSpPr>
-          <p:cNvPr id="43" name="Shape 41"/>
-          <p:cNvSpPr/>
-          <p:nvPr/>
-        </p:nvSpPr>
-        <p:spPr>
-          <a:xfrm>
-            <a:off x="4850892" y="4169664"/>
-            <a:ext cx="685800" cy="384048"/>
-          </a:xfrm>
-          <a:prstGeom prst="rect">
-            <a:avLst>
-              <a:gd name="adj" fmla="val 9524"/>
-            </a:avLst>
-          </a:prstGeom>
-          <a:solidFill>
-            <a:srgbClr val="FFFFFF"/>
-          </a:solidFill>
-          <a:ln w="12700">
-            <a:solidFill>
-              <a:srgbClr val="DB2777"/>
-            </a:solidFill>
-            <a:prstDash val="solid"/>
-          </a:ln>
-        </p:spPr>
-      </p:sp>
-      <p:sp>
-        <p:nvSpPr>
-          <p:cNvPr id="44" name="Text 42"/>
-          <p:cNvSpPr/>
-          <p:nvPr/>
-        </p:nvSpPr>
-        <p:spPr>
-          <a:xfrm>
-            <a:off x="4850892" y="4169664"/>
-            <a:ext cx="685800" cy="384048"/>
-          </a:xfrm>
-          <a:prstGeom prst="rect">
-            <a:avLst/>
-          </a:prstGeom>
-          <a:noFill/>
-          <a:ln/>
-        </p:spPr>
-        <p:txBody>
-          <a:bodyPr wrap="square" lIns="0" tIns="0" rIns="0" bIns="0" rtlCol="0" anchor="ctr"/>
-          <a:lstStyle/>
-          <a:p>
-            <a:pPr algn="ctr" indent="0" marL="0">
-              <a:buNone/>
-            </a:pPr>
-            <a:r>
-              <a:rPr lang="en-US" sz="900" b="1" dirty="0">
-                <a:solidFill>
-                  <a:srgbClr val="9D174D"/>
-                </a:solidFill>
-                <a:latin typeface="Trebuchet MS" pitchFamily="34" charset="0"/>
-                <a:ea typeface="Trebuchet MS" pitchFamily="34" charset="-122"/>
-                <a:cs typeface="Trebuchet MS" pitchFamily="34" charset="-120"/>
-              </a:rPr>
-              <a:t>d</a:t>
-            </a:r>
-            <a:endParaRPr lang="en-US" sz="900" dirty="0"/>
-          </a:p>
-        </p:txBody>
-      </p:sp>
-      <p:sp>
-        <p:nvSpPr>
-          <p:cNvPr id="45" name="Shape 43"/>
-          <p:cNvSpPr/>
-          <p:nvPr/>
-        </p:nvSpPr>
-        <p:spPr>
-          <a:xfrm>
-            <a:off x="5759577" y="4169664"/>
-            <a:ext cx="685800" cy="384048"/>
-          </a:xfrm>
-          <a:prstGeom prst="rect">
-            <a:avLst>
-              <a:gd name="adj" fmla="val 9524"/>
-            </a:avLst>
-          </a:prstGeom>
-          <a:solidFill>
-            <a:srgbClr val="FFFFFF"/>
-          </a:solidFill>
-          <a:ln w="12700">
-            <a:solidFill>
-              <a:srgbClr val="DB2777"/>
-            </a:solidFill>
-            <a:prstDash val="solid"/>
-          </a:ln>
-        </p:spPr>
-      </p:sp>
-      <p:sp>
-        <p:nvSpPr>
-          <p:cNvPr id="46" name="Text 44"/>
-          <p:cNvSpPr/>
-          <p:nvPr/>
-        </p:nvSpPr>
-        <p:spPr>
-          <a:xfrm>
-            <a:off x="5759577" y="4169664"/>
-            <a:ext cx="685800" cy="384048"/>
-          </a:xfrm>
-          <a:prstGeom prst="rect">
-            <a:avLst/>
-          </a:prstGeom>
-          <a:noFill/>
-          <a:ln/>
-        </p:spPr>
-        <p:txBody>
-          <a:bodyPr wrap="square" lIns="0" tIns="0" rIns="0" bIns="0" rtlCol="0" anchor="ctr"/>
-          <a:lstStyle/>
-          <a:p>
-            <a:pPr algn="ctr" indent="0" marL="0">
-              <a:buNone/>
-            </a:pPr>
-            <a:r>
-              <a:rPr lang="en-US" sz="900" b="1" dirty="0">
-                <a:solidFill>
-                  <a:srgbClr val="9D174D"/>
-                </a:solidFill>
-                <a:latin typeface="Trebuchet MS" pitchFamily="34" charset="0"/>
-                <a:ea typeface="Trebuchet MS" pitchFamily="34" charset="-122"/>
-                <a:cs typeface="Trebuchet MS" pitchFamily="34" charset="-120"/>
-              </a:rPr>
-              <a:t>u</a:t>
-            </a:r>
-            <a:endParaRPr lang="en-US" sz="900" dirty="0"/>
-          </a:p>
-        </p:txBody>
-      </p:sp>
-      <p:sp>
-        <p:nvSpPr>
-          <p:cNvPr id="47" name="Shape 45"/>
-          <p:cNvSpPr/>
-          <p:nvPr/>
-        </p:nvSpPr>
-        <p:spPr>
-          <a:xfrm>
-            <a:off x="6668262" y="4169664"/>
-            <a:ext cx="685800" cy="384048"/>
-          </a:xfrm>
-          <a:prstGeom prst="rect">
-            <a:avLst>
-              <a:gd name="adj" fmla="val 9524"/>
-            </a:avLst>
-          </a:prstGeom>
-          <a:solidFill>
-            <a:srgbClr val="FFFFFF"/>
-          </a:solidFill>
-          <a:ln w="12700">
-            <a:solidFill>
-              <a:srgbClr val="DB2777"/>
-            </a:solidFill>
-            <a:prstDash val="solid"/>
-          </a:ln>
-        </p:spPr>
-      </p:sp>
-      <p:sp>
-        <p:nvSpPr>
-          <p:cNvPr id="48" name="Text 46"/>
-          <p:cNvSpPr/>
-          <p:nvPr/>
-        </p:nvSpPr>
-        <p:spPr>
-          <a:xfrm>
-            <a:off x="6668262" y="4169664"/>
-            <a:ext cx="685800" cy="384048"/>
-          </a:xfrm>
-          <a:prstGeom prst="rect">
-            <a:avLst/>
-          </a:prstGeom>
-          <a:noFill/>
-          <a:ln/>
-        </p:spPr>
-        <p:txBody>
-          <a:bodyPr wrap="square" lIns="0" tIns="0" rIns="0" bIns="0" rtlCol="0" anchor="ctr"/>
-          <a:lstStyle/>
-          <a:p>
-            <a:pPr algn="ctr" indent="0" marL="0">
-              <a:buNone/>
-            </a:pPr>
-            <a:r>
-              <a:rPr lang="en-US" sz="900" b="1" dirty="0">
-                <a:solidFill>
-                  <a:srgbClr val="9D174D"/>
-                </a:solidFill>
-                <a:latin typeface="Trebuchet MS" pitchFamily="34" charset="0"/>
-                <a:ea typeface="Trebuchet MS" pitchFamily="34" charset="-122"/>
-                <a:cs typeface="Trebuchet MS" pitchFamily="34" charset="-120"/>
-              </a:rPr>
-              <a:t>c</a:t>
-            </a:r>
-            <a:endParaRPr lang="en-US" sz="900" dirty="0"/>
-          </a:p>
-        </p:txBody>
-      </p:sp>
-      <p:sp>
-        <p:nvSpPr>
-          <p:cNvPr id="49" name="Text 47"/>
-          <p:cNvSpPr/>
-          <p:nvPr/>
-        </p:nvSpPr>
-        <p:spPr>
-          <a:xfrm>
-            <a:off x="6668262" y="4572000"/>
-            <a:ext cx="685800" cy="219456"/>
-          </a:xfrm>
-          <a:prstGeom prst="rect">
-            <a:avLst/>
-          </a:prstGeom>
-          <a:noFill/>
-          <a:ln/>
-        </p:spPr>
-        <p:txBody>
-          <a:bodyPr wrap="square" lIns="0" tIns="0" rIns="0" bIns="0" rtlCol="0" anchor="t"/>
-          <a:lstStyle/>
-          <a:p>
-            <a:pPr algn="ctr" indent="0" marL="0">
-              <a:buNone/>
-            </a:pPr>
-            <a:r>
-              <a:rPr lang="en-US" sz="750" i="1" dirty="0">
-                <a:solidFill>
-                  <a:srgbClr val="94A3B8"/>
-                </a:solidFill>
-                <a:latin typeface="Calibri" pitchFamily="34" charset="0"/>
-                <a:ea typeface="Calibri" pitchFamily="34" charset="-122"/>
-                <a:cs typeface="Calibri" pitchFamily="34" charset="-120"/>
-              </a:rPr>
-              <a:t>/k/</a:t>
-            </a:r>
-            <a:endParaRPr lang="en-US" sz="750" dirty="0"/>
-          </a:p>
-        </p:txBody>
-      </p:sp>
-      <p:sp>
-        <p:nvSpPr>
-          <p:cNvPr id="50" name="Shape 48"/>
-          <p:cNvSpPr/>
-          <p:nvPr/>
-        </p:nvSpPr>
-        <p:spPr>
-          <a:xfrm>
-            <a:off x="7576947" y="4169664"/>
-            <a:ext cx="685800" cy="384048"/>
-          </a:xfrm>
-          <a:prstGeom prst="rect">
-            <a:avLst>
-              <a:gd name="adj" fmla="val 9524"/>
-            </a:avLst>
-          </a:prstGeom>
-          <a:solidFill>
-            <a:srgbClr val="FFFFFF"/>
-          </a:solidFill>
-          <a:ln w="12700">
-            <a:solidFill>
-              <a:srgbClr val="DB2777"/>
-            </a:solidFill>
-            <a:prstDash val="solid"/>
-          </a:ln>
-        </p:spPr>
-      </p:sp>
-      <p:sp>
-        <p:nvSpPr>
-          <p:cNvPr id="51" name="Text 49"/>
-          <p:cNvSpPr/>
-          <p:nvPr/>
-        </p:nvSpPr>
-        <p:spPr>
-          <a:xfrm>
-            <a:off x="7576947" y="4169664"/>
-            <a:ext cx="685800" cy="384048"/>
-          </a:xfrm>
-          <a:prstGeom prst="rect">
-            <a:avLst/>
-          </a:prstGeom>
-          <a:noFill/>
-          <a:ln/>
-        </p:spPr>
-        <p:txBody>
-          <a:bodyPr wrap="square" lIns="0" tIns="0" rIns="0" bIns="0" rtlCol="0" anchor="ctr"/>
-          <a:lstStyle/>
-          <a:p>
-            <a:pPr algn="ctr" indent="0" marL="0">
-              <a:buNone/>
-            </a:pPr>
-            <a:r>
-              <a:rPr lang="en-US" sz="900" b="1" dirty="0">
-                <a:solidFill>
-                  <a:srgbClr val="9D174D"/>
-                </a:solidFill>
-                <a:latin typeface="Trebuchet MS" pitchFamily="34" charset="0"/>
-                <a:ea typeface="Trebuchet MS" pitchFamily="34" charset="-122"/>
-                <a:cs typeface="Trebuchet MS" pitchFamily="34" charset="-120"/>
-              </a:rPr>
-              <a:t>t</a:t>
-            </a:r>
-            <a:endParaRPr lang="en-US" sz="900" dirty="0"/>
           </a:p>
         </p:txBody>
       </p:sp>
@@ -24106,7 +23935,7 @@
                 <a:ea typeface="Trebuchet MS" pitchFamily="34" charset="-122"/>
                 <a:cs typeface="Trebuchet MS" pitchFamily="34" charset="-120"/>
               </a:rPr>
-              <a:t>introduce</a:t>
+              <a:t>education</a:t>
             </a:r>
             <a:endParaRPr lang="en-US" sz="2800" dirty="0"/>
           </a:p>
@@ -24933,7 +24762,7 @@
                 <a:ea typeface="Trebuchet MS" pitchFamily="34" charset="-122"/>
                 <a:cs typeface="Trebuchet MS" pitchFamily="34" charset="-120"/>
               </a:rPr>
-              <a:t>introduce</a:t>
+              <a:t>education</a:t>
             </a:r>
             <a:endParaRPr lang="en-US" sz="2800" dirty="0"/>
           </a:p>
@@ -25072,7 +24901,7 @@
                 <a:ea typeface="Trebuchet MS" pitchFamily="34" charset="-122"/>
                 <a:cs typeface="Trebuchet MS" pitchFamily="34" charset="-120"/>
               </a:rPr>
-              <a:t>in</a:t>
+              <a:t>e</a:t>
             </a:r>
             <a:endParaRPr lang="en-US" sz="1300" dirty="0"/>
           </a:p>
@@ -25111,7 +24940,7 @@
                 <a:ea typeface="Calibri" pitchFamily="34" charset="-122"/>
                 <a:cs typeface="Calibri" pitchFamily="34" charset="-120"/>
               </a:rPr>
-              <a:t>into</a:t>
+              <a:t>out</a:t>
             </a:r>
             <a:endParaRPr lang="en-US" sz="850" dirty="0"/>
           </a:p>
@@ -25134,11 +24963,11 @@
             </a:avLst>
           </a:prstGeom>
           <a:solidFill>
-            <a:srgbClr val="FCE7F3"/>
+            <a:srgbClr val="CCFBF1"/>
           </a:solidFill>
           <a:ln w="19050">
             <a:solidFill>
-              <a:srgbClr val="DB2777"/>
+              <a:srgbClr val="0D9488"/>
             </a:solidFill>
             <a:prstDash val="solid"/>
           </a:ln>
@@ -25178,13 +25007,13 @@
             <a:r>
               <a:rPr lang="en-US" sz="1300" b="1" dirty="0">
                 <a:solidFill>
-                  <a:srgbClr val="9D174D"/>
+                  <a:srgbClr val="0F766E"/>
                 </a:solidFill>
                 <a:latin typeface="Trebuchet MS" pitchFamily="34" charset="0"/>
                 <a:ea typeface="Trebuchet MS" pitchFamily="34" charset="-122"/>
                 <a:cs typeface="Trebuchet MS" pitchFamily="34" charset="-120"/>
               </a:rPr>
-              <a:t>tro</a:t>
+              <a:t>duc</a:t>
             </a:r>
             <a:endParaRPr lang="en-US" sz="1300" dirty="0"/>
           </a:p>
@@ -25223,7 +25052,7 @@
                 <a:ea typeface="Calibri" pitchFamily="34" charset="-122"/>
                 <a:cs typeface="Calibri" pitchFamily="34" charset="-120"/>
               </a:rPr>
-              <a:t>connecting form</a:t>
+              <a:t>to lead</a:t>
             </a:r>
             <a:endParaRPr lang="en-US" sz="850" dirty="0"/>
           </a:p>
@@ -25246,11 +25075,11 @@
             </a:avLst>
           </a:prstGeom>
           <a:solidFill>
-            <a:srgbClr val="CCFBF1"/>
+            <a:srgbClr val="FCE7F3"/>
           </a:solidFill>
           <a:ln w="19050">
             <a:solidFill>
-              <a:srgbClr val="0D9488"/>
+              <a:srgbClr val="DB2777"/>
             </a:solidFill>
             <a:prstDash val="solid"/>
           </a:ln>
@@ -25290,13 +25119,13 @@
             <a:r>
               <a:rPr lang="en-US" sz="1300" b="1" dirty="0">
                 <a:solidFill>
-                  <a:srgbClr val="0F766E"/>
+                  <a:srgbClr val="9D174D"/>
                 </a:solidFill>
                 <a:latin typeface="Trebuchet MS" pitchFamily="34" charset="0"/>
                 <a:ea typeface="Trebuchet MS" pitchFamily="34" charset="-122"/>
                 <a:cs typeface="Trebuchet MS" pitchFamily="34" charset="-120"/>
               </a:rPr>
-              <a:t>duc</a:t>
+              <a:t>a</a:t>
             </a:r>
             <a:endParaRPr lang="en-US" sz="1300" dirty="0"/>
           </a:p>
@@ -25335,7 +25164,7 @@
                 <a:ea typeface="Calibri" pitchFamily="34" charset="-122"/>
                 <a:cs typeface="Calibri" pitchFamily="34" charset="-120"/>
               </a:rPr>
-              <a:t>to lead</a:t>
+              <a:t>connecting vowel</a:t>
             </a:r>
             <a:endParaRPr lang="en-US" sz="850" dirty="0"/>
           </a:p>
@@ -25343,7 +25172,46 @@
       </p:sp>
       <p:sp>
         <p:nvSpPr>
-          <p:cNvPr id="25" name="Shape 23"/>
+          <p:cNvPr id="25" name="Text 23"/>
+          <p:cNvSpPr/>
+          <p:nvPr/>
+        </p:nvSpPr>
+        <p:spPr>
+          <a:xfrm>
+            <a:off x="5329123" y="2752344"/>
+            <a:ext cx="1581912" cy="182880"/>
+          </a:xfrm>
+          <a:prstGeom prst="rect">
+            <a:avLst/>
+          </a:prstGeom>
+          <a:noFill/>
+          <a:ln/>
+        </p:spPr>
+        <p:txBody>
+          <a:bodyPr wrap="square" lIns="0" tIns="0" rIns="0" bIns="0" rtlCol="0" anchor="t"/>
+          <a:lstStyle/>
+          <a:p>
+            <a:pPr algn="ctr" indent="0" marL="0">
+              <a:buNone/>
+            </a:pPr>
+            <a:r>
+              <a:rPr lang="en-US" sz="700" i="1" dirty="0">
+                <a:solidFill>
+                  <a:srgbClr val="94A3B8"/>
+                </a:solidFill>
+                <a:latin typeface="Calibri" pitchFamily="34" charset="0"/>
+                <a:ea typeface="Calibri" pitchFamily="34" charset="-122"/>
+                <a:cs typeface="Calibri" pitchFamily="34" charset="-120"/>
+              </a:rPr>
+              <a:t>links base to suffix</a:t>
+            </a:r>
+            <a:endParaRPr lang="en-US" sz="700" dirty="0"/>
+          </a:p>
+        </p:txBody>
+      </p:sp>
+      <p:sp>
+        <p:nvSpPr>
+          <p:cNvPr id="26" name="Shape 24"/>
           <p:cNvSpPr/>
           <p:nvPr/>
         </p:nvSpPr>
@@ -25377,7 +25245,7 @@
       </p:sp>
       <p:sp>
         <p:nvSpPr>
-          <p:cNvPr id="26" name="Text 24"/>
+          <p:cNvPr id="27" name="Text 25"/>
           <p:cNvSpPr/>
           <p:nvPr/>
         </p:nvSpPr>
@@ -25408,7 +25276,7 @@
                 <a:ea typeface="Trebuchet MS" pitchFamily="34" charset="-122"/>
                 <a:cs typeface="Trebuchet MS" pitchFamily="34" charset="-120"/>
               </a:rPr>
-              <a:t>e</a:t>
+              <a:t>tion</a:t>
             </a:r>
             <a:endParaRPr lang="en-US" sz="1300" dirty="0"/>
           </a:p>
@@ -25416,7 +25284,7 @@
       </p:sp>
       <p:sp>
         <p:nvSpPr>
-          <p:cNvPr id="27" name="Text 25"/>
+          <p:cNvPr id="28" name="Text 26"/>
           <p:cNvSpPr/>
           <p:nvPr/>
         </p:nvSpPr>
@@ -25447,7 +25315,7 @@
                 <a:ea typeface="Calibri" pitchFamily="34" charset="-122"/>
                 <a:cs typeface="Calibri" pitchFamily="34" charset="-120"/>
               </a:rPr>
-              <a:t>verb-forming suffix</a:t>
+              <a:t>act or process of</a:t>
             </a:r>
             <a:endParaRPr lang="en-US" sz="850" dirty="0"/>
           </a:p>
@@ -25455,7 +25323,7 @@
       </p:sp>
       <p:sp>
         <p:nvSpPr>
-          <p:cNvPr id="28" name="Shape 26"/>
+          <p:cNvPr id="29" name="Shape 27"/>
           <p:cNvSpPr/>
           <p:nvPr/>
         </p:nvSpPr>
@@ -25482,7 +25350,7 @@
       </p:sp>
       <p:sp>
         <p:nvSpPr>
-          <p:cNvPr id="29" name="Text 27"/>
+          <p:cNvPr id="30" name="Text 28"/>
           <p:cNvSpPr/>
           <p:nvPr/>
         </p:nvSpPr>
@@ -25521,7 +25389,7 @@
       </p:sp>
       <p:sp>
         <p:nvSpPr>
-          <p:cNvPr id="30" name="Shape 28"/>
+          <p:cNvPr id="31" name="Shape 29"/>
           <p:cNvSpPr/>
           <p:nvPr/>
         </p:nvSpPr>
@@ -25548,7 +25416,7 @@
       </p:sp>
       <p:sp>
         <p:nvSpPr>
-          <p:cNvPr id="31" name="Text 29"/>
+          <p:cNvPr id="32" name="Text 30"/>
           <p:cNvSpPr/>
           <p:nvPr/>
         </p:nvSpPr>
@@ -25587,7 +25455,7 @@
       </p:sp>
       <p:sp>
         <p:nvSpPr>
-          <p:cNvPr id="32" name="Shape 30"/>
+          <p:cNvPr id="33" name="Shape 31"/>
           <p:cNvSpPr/>
           <p:nvPr/>
         </p:nvSpPr>
@@ -25614,7 +25482,7 @@
       </p:sp>
       <p:sp>
         <p:nvSpPr>
-          <p:cNvPr id="33" name="Text 31"/>
+          <p:cNvPr id="34" name="Text 32"/>
           <p:cNvSpPr/>
           <p:nvPr/>
         </p:nvSpPr>
@@ -25653,7 +25521,7 @@
       </p:sp>
       <p:sp>
         <p:nvSpPr>
-          <p:cNvPr id="34" name="Shape 32"/>
+          <p:cNvPr id="35" name="Shape 33"/>
           <p:cNvSpPr/>
           <p:nvPr/>
         </p:nvSpPr>
@@ -25680,7 +25548,7 @@
       </p:sp>
       <p:sp>
         <p:nvSpPr>
-          <p:cNvPr id="35" name="Text 33"/>
+          <p:cNvPr id="36" name="Text 34"/>
           <p:cNvSpPr/>
           <p:nvPr/>
         </p:nvSpPr>
@@ -26861,7 +26729,7 @@
                 <a:ea typeface="Trebuchet MS" pitchFamily="34" charset="-122"/>
                 <a:cs typeface="Trebuchet MS" pitchFamily="34" charset="-120"/>
               </a:rPr>
-              <a:t>introduce</a:t>
+              <a:t>education</a:t>
             </a:r>
             <a:endParaRPr lang="en-US" sz="2800" dirty="0"/>
           </a:p>
@@ -27000,7 +26868,7 @@
                 <a:ea typeface="Trebuchet MS" pitchFamily="34" charset="-122"/>
                 <a:cs typeface="Trebuchet MS" pitchFamily="34" charset="-120"/>
               </a:rPr>
-              <a:t>in</a:t>
+              <a:t>e</a:t>
             </a:r>
             <a:endParaRPr lang="en-US" sz="1300" dirty="0"/>
           </a:p>
@@ -27039,7 +26907,7 @@
                 <a:ea typeface="Calibri" pitchFamily="34" charset="-122"/>
                 <a:cs typeface="Calibri" pitchFamily="34" charset="-120"/>
               </a:rPr>
-              <a:t>into</a:t>
+              <a:t>out</a:t>
             </a:r>
             <a:endParaRPr lang="en-US" sz="850" dirty="0"/>
           </a:p>
@@ -27062,11 +26930,11 @@
             </a:avLst>
           </a:prstGeom>
           <a:solidFill>
-            <a:srgbClr val="FCE7F3"/>
+            <a:srgbClr val="CCFBF1"/>
           </a:solidFill>
           <a:ln w="19050">
             <a:solidFill>
-              <a:srgbClr val="DB2777"/>
+              <a:srgbClr val="0D9488"/>
             </a:solidFill>
             <a:prstDash val="solid"/>
           </a:ln>
@@ -27106,13 +26974,13 @@
             <a:r>
               <a:rPr lang="en-US" sz="1300" b="1" dirty="0">
                 <a:solidFill>
-                  <a:srgbClr val="9D174D"/>
+                  <a:srgbClr val="0F766E"/>
                 </a:solidFill>
                 <a:latin typeface="Trebuchet MS" pitchFamily="34" charset="0"/>
                 <a:ea typeface="Trebuchet MS" pitchFamily="34" charset="-122"/>
                 <a:cs typeface="Trebuchet MS" pitchFamily="34" charset="-120"/>
               </a:rPr>
-              <a:t>tro</a:t>
+              <a:t>duc</a:t>
             </a:r>
             <a:endParaRPr lang="en-US" sz="1300" dirty="0"/>
           </a:p>
@@ -27151,7 +27019,7 @@
                 <a:ea typeface="Calibri" pitchFamily="34" charset="-122"/>
                 <a:cs typeface="Calibri" pitchFamily="34" charset="-120"/>
               </a:rPr>
-              <a:t>connecting form</a:t>
+              <a:t>to lead</a:t>
             </a:r>
             <a:endParaRPr lang="en-US" sz="850" dirty="0"/>
           </a:p>
@@ -27174,11 +27042,11 @@
             </a:avLst>
           </a:prstGeom>
           <a:solidFill>
-            <a:srgbClr val="CCFBF1"/>
+            <a:srgbClr val="FCE7F3"/>
           </a:solidFill>
           <a:ln w="19050">
             <a:solidFill>
-              <a:srgbClr val="0D9488"/>
+              <a:srgbClr val="DB2777"/>
             </a:solidFill>
             <a:prstDash val="solid"/>
           </a:ln>
@@ -27218,13 +27086,13 @@
             <a:r>
               <a:rPr lang="en-US" sz="1300" b="1" dirty="0">
                 <a:solidFill>
-                  <a:srgbClr val="0F766E"/>
+                  <a:srgbClr val="9D174D"/>
                 </a:solidFill>
                 <a:latin typeface="Trebuchet MS" pitchFamily="34" charset="0"/>
                 <a:ea typeface="Trebuchet MS" pitchFamily="34" charset="-122"/>
                 <a:cs typeface="Trebuchet MS" pitchFamily="34" charset="-120"/>
               </a:rPr>
-              <a:t>duc</a:t>
+              <a:t>a</a:t>
             </a:r>
             <a:endParaRPr lang="en-US" sz="1300" dirty="0"/>
           </a:p>
@@ -27263,7 +27131,7 @@
                 <a:ea typeface="Calibri" pitchFamily="34" charset="-122"/>
                 <a:cs typeface="Calibri" pitchFamily="34" charset="-120"/>
               </a:rPr>
-              <a:t>to lead</a:t>
+              <a:t>connecting vowel</a:t>
             </a:r>
             <a:endParaRPr lang="en-US" sz="850" dirty="0"/>
           </a:p>
@@ -27271,7 +27139,46 @@
       </p:sp>
       <p:sp>
         <p:nvSpPr>
-          <p:cNvPr id="25" name="Shape 23"/>
+          <p:cNvPr id="25" name="Text 23"/>
+          <p:cNvSpPr/>
+          <p:nvPr/>
+        </p:nvSpPr>
+        <p:spPr>
+          <a:xfrm>
+            <a:off x="5329123" y="2752344"/>
+            <a:ext cx="1581912" cy="182880"/>
+          </a:xfrm>
+          <a:prstGeom prst="rect">
+            <a:avLst/>
+          </a:prstGeom>
+          <a:noFill/>
+          <a:ln/>
+        </p:spPr>
+        <p:txBody>
+          <a:bodyPr wrap="square" lIns="0" tIns="0" rIns="0" bIns="0" rtlCol="0" anchor="t"/>
+          <a:lstStyle/>
+          <a:p>
+            <a:pPr algn="ctr" indent="0" marL="0">
+              <a:buNone/>
+            </a:pPr>
+            <a:r>
+              <a:rPr lang="en-US" sz="700" i="1" dirty="0">
+                <a:solidFill>
+                  <a:srgbClr val="94A3B8"/>
+                </a:solidFill>
+                <a:latin typeface="Calibri" pitchFamily="34" charset="0"/>
+                <a:ea typeface="Calibri" pitchFamily="34" charset="-122"/>
+                <a:cs typeface="Calibri" pitchFamily="34" charset="-120"/>
+              </a:rPr>
+              <a:t>links base to suffix</a:t>
+            </a:r>
+            <a:endParaRPr lang="en-US" sz="700" dirty="0"/>
+          </a:p>
+        </p:txBody>
+      </p:sp>
+      <p:sp>
+        <p:nvSpPr>
+          <p:cNvPr id="26" name="Shape 24"/>
           <p:cNvSpPr/>
           <p:nvPr/>
         </p:nvSpPr>
@@ -27305,7 +27212,7 @@
       </p:sp>
       <p:sp>
         <p:nvSpPr>
-          <p:cNvPr id="26" name="Text 24"/>
+          <p:cNvPr id="27" name="Text 25"/>
           <p:cNvSpPr/>
           <p:nvPr/>
         </p:nvSpPr>
@@ -27336,7 +27243,7 @@
                 <a:ea typeface="Trebuchet MS" pitchFamily="34" charset="-122"/>
                 <a:cs typeface="Trebuchet MS" pitchFamily="34" charset="-120"/>
               </a:rPr>
-              <a:t>e</a:t>
+              <a:t>tion</a:t>
             </a:r>
             <a:endParaRPr lang="en-US" sz="1300" dirty="0"/>
           </a:p>
@@ -27344,7 +27251,7 @@
       </p:sp>
       <p:sp>
         <p:nvSpPr>
-          <p:cNvPr id="27" name="Text 25"/>
+          <p:cNvPr id="28" name="Text 26"/>
           <p:cNvSpPr/>
           <p:nvPr/>
         </p:nvSpPr>
@@ -27375,7 +27282,7 @@
                 <a:ea typeface="Calibri" pitchFamily="34" charset="-122"/>
                 <a:cs typeface="Calibri" pitchFamily="34" charset="-120"/>
               </a:rPr>
-              <a:t>verb-forming suffix</a:t>
+              <a:t>act or process of</a:t>
             </a:r>
             <a:endParaRPr lang="en-US" sz="850" dirty="0"/>
           </a:p>
@@ -27383,7 +27290,7 @@
       </p:sp>
       <p:sp>
         <p:nvSpPr>
-          <p:cNvPr id="28" name="Shape 26"/>
+          <p:cNvPr id="29" name="Shape 27"/>
           <p:cNvSpPr/>
           <p:nvPr/>
         </p:nvSpPr>
@@ -27410,7 +27317,7 @@
       </p:sp>
       <p:sp>
         <p:nvSpPr>
-          <p:cNvPr id="29" name="Text 27"/>
+          <p:cNvPr id="30" name="Text 28"/>
           <p:cNvSpPr/>
           <p:nvPr/>
         </p:nvSpPr>
@@ -27449,7 +27356,7 @@
       </p:sp>
       <p:sp>
         <p:nvSpPr>
-          <p:cNvPr id="30" name="Shape 28"/>
+          <p:cNvPr id="31" name="Shape 29"/>
           <p:cNvSpPr/>
           <p:nvPr/>
         </p:nvSpPr>
@@ -27476,14 +27383,14 @@
       </p:sp>
       <p:sp>
         <p:nvSpPr>
-          <p:cNvPr id="31" name="Shape 29"/>
-          <p:cNvSpPr/>
-          <p:nvPr/>
-        </p:nvSpPr>
-        <p:spPr>
-          <a:xfrm>
-            <a:off x="2313432" y="3364992"/>
-            <a:ext cx="1645920" cy="475488"/>
+          <p:cNvPr id="32" name="Shape 30"/>
+          <p:cNvSpPr/>
+          <p:nvPr/>
+        </p:nvSpPr>
+        <p:spPr>
+          <a:xfrm>
+            <a:off x="1975104" y="3364992"/>
+            <a:ext cx="1554480" cy="475488"/>
           </a:xfrm>
           <a:prstGeom prst="rect">
             <a:avLst>
@@ -27503,14 +27410,14 @@
       </p:sp>
       <p:sp>
         <p:nvSpPr>
-          <p:cNvPr id="32" name="Text 30"/>
-          <p:cNvSpPr/>
-          <p:nvPr/>
-        </p:nvSpPr>
-        <p:spPr>
-          <a:xfrm>
-            <a:off x="2313432" y="3364992"/>
-            <a:ext cx="1645920" cy="475488"/>
+          <p:cNvPr id="33" name="Text 31"/>
+          <p:cNvSpPr/>
+          <p:nvPr/>
+        </p:nvSpPr>
+        <p:spPr>
+          <a:xfrm>
+            <a:off x="1975104" y="3364992"/>
+            <a:ext cx="1554480" cy="475488"/>
           </a:xfrm>
           <a:prstGeom prst="rect">
             <a:avLst/>
@@ -27534,7 +27441,7 @@
                 <a:ea typeface="Trebuchet MS" pitchFamily="34" charset="-122"/>
                 <a:cs typeface="Trebuchet MS" pitchFamily="34" charset="-120"/>
               </a:rPr>
-              <a:t>in</a:t>
+              <a:t>ed</a:t>
             </a:r>
             <a:endParaRPr lang="en-US" sz="1400" dirty="0"/>
           </a:p>
@@ -27542,14 +27449,14 @@
       </p:sp>
       <p:sp>
         <p:nvSpPr>
-          <p:cNvPr id="33" name="Text 31"/>
-          <p:cNvSpPr/>
-          <p:nvPr/>
-        </p:nvSpPr>
-        <p:spPr>
-          <a:xfrm>
-            <a:off x="3959352" y="3364992"/>
-            <a:ext cx="411480" cy="475488"/>
+          <p:cNvPr id="34" name="Text 32"/>
+          <p:cNvSpPr/>
+          <p:nvPr/>
+        </p:nvSpPr>
+        <p:spPr>
+          <a:xfrm>
+            <a:off x="3529584" y="3364992"/>
+            <a:ext cx="73152" cy="475488"/>
           </a:xfrm>
           <a:prstGeom prst="rect">
             <a:avLst/>
@@ -27581,14 +27488,14 @@
       </p:sp>
       <p:sp>
         <p:nvSpPr>
-          <p:cNvPr id="34" name="Shape 32"/>
-          <p:cNvSpPr/>
-          <p:nvPr/>
-        </p:nvSpPr>
-        <p:spPr>
-          <a:xfrm>
-            <a:off x="4370832" y="3364992"/>
-            <a:ext cx="1645920" cy="475488"/>
+          <p:cNvPr id="35" name="Shape 33"/>
+          <p:cNvSpPr/>
+          <p:nvPr/>
+        </p:nvSpPr>
+        <p:spPr>
+          <a:xfrm>
+            <a:off x="3602736" y="3364992"/>
+            <a:ext cx="1554480" cy="475488"/>
           </a:xfrm>
           <a:prstGeom prst="rect">
             <a:avLst>
@@ -27608,14 +27515,14 @@
       </p:sp>
       <p:sp>
         <p:nvSpPr>
-          <p:cNvPr id="35" name="Text 33"/>
-          <p:cNvSpPr/>
-          <p:nvPr/>
-        </p:nvSpPr>
-        <p:spPr>
-          <a:xfrm>
-            <a:off x="4370832" y="3364992"/>
-            <a:ext cx="1645920" cy="475488"/>
+          <p:cNvPr id="36" name="Text 34"/>
+          <p:cNvSpPr/>
+          <p:nvPr/>
+        </p:nvSpPr>
+        <p:spPr>
+          <a:xfrm>
+            <a:off x="3602736" y="3364992"/>
+            <a:ext cx="1554480" cy="475488"/>
           </a:xfrm>
           <a:prstGeom prst="rect">
             <a:avLst/>
@@ -27639,7 +27546,7 @@
                 <a:ea typeface="Trebuchet MS" pitchFamily="34" charset="-122"/>
                 <a:cs typeface="Trebuchet MS" pitchFamily="34" charset="-120"/>
               </a:rPr>
-              <a:t>tro</a:t>
+              <a:t>u</a:t>
             </a:r>
             <a:endParaRPr lang="en-US" sz="1400" dirty="0"/>
           </a:p>
@@ -27647,14 +27554,14 @@
       </p:sp>
       <p:sp>
         <p:nvSpPr>
-          <p:cNvPr id="36" name="Text 34"/>
-          <p:cNvSpPr/>
-          <p:nvPr/>
-        </p:nvSpPr>
-        <p:spPr>
-          <a:xfrm>
-            <a:off x="6016752" y="3364992"/>
-            <a:ext cx="411480" cy="475488"/>
+          <p:cNvPr id="37" name="Text 35"/>
+          <p:cNvSpPr/>
+          <p:nvPr/>
+        </p:nvSpPr>
+        <p:spPr>
+          <a:xfrm>
+            <a:off x="5157216" y="3364992"/>
+            <a:ext cx="73152" cy="475488"/>
           </a:xfrm>
           <a:prstGeom prst="rect">
             <a:avLst/>
@@ -27686,14 +27593,14 @@
       </p:sp>
       <p:sp>
         <p:nvSpPr>
-          <p:cNvPr id="37" name="Shape 35"/>
-          <p:cNvSpPr/>
-          <p:nvPr/>
-        </p:nvSpPr>
-        <p:spPr>
-          <a:xfrm>
-            <a:off x="6428232" y="3364992"/>
-            <a:ext cx="1645920" cy="475488"/>
+          <p:cNvPr id="38" name="Shape 36"/>
+          <p:cNvSpPr/>
+          <p:nvPr/>
+        </p:nvSpPr>
+        <p:spPr>
+          <a:xfrm>
+            <a:off x="5230368" y="3364992"/>
+            <a:ext cx="1554480" cy="475488"/>
           </a:xfrm>
           <a:prstGeom prst="rect">
             <a:avLst>
@@ -27713,14 +27620,14 @@
       </p:sp>
       <p:sp>
         <p:nvSpPr>
-          <p:cNvPr id="38" name="Text 36"/>
-          <p:cNvSpPr/>
-          <p:nvPr/>
-        </p:nvSpPr>
-        <p:spPr>
-          <a:xfrm>
-            <a:off x="6428232" y="3364992"/>
-            <a:ext cx="1645920" cy="475488"/>
+          <p:cNvPr id="39" name="Text 37"/>
+          <p:cNvSpPr/>
+          <p:nvPr/>
+        </p:nvSpPr>
+        <p:spPr>
+          <a:xfrm>
+            <a:off x="5230368" y="3364992"/>
+            <a:ext cx="1554480" cy="475488"/>
           </a:xfrm>
           <a:prstGeom prst="rect">
             <a:avLst/>
@@ -27744,7 +27651,7 @@
                 <a:ea typeface="Trebuchet MS" pitchFamily="34" charset="-122"/>
                 <a:cs typeface="Trebuchet MS" pitchFamily="34" charset="-120"/>
               </a:rPr>
-              <a:t>duce</a:t>
+              <a:t>ca</a:t>
             </a:r>
             <a:endParaRPr lang="en-US" sz="1400" dirty="0"/>
           </a:p>
@@ -27752,7 +27659,112 @@
       </p:sp>
       <p:sp>
         <p:nvSpPr>
-          <p:cNvPr id="39" name="Shape 37"/>
+          <p:cNvPr id="40" name="Text 38"/>
+          <p:cNvSpPr/>
+          <p:nvPr/>
+        </p:nvSpPr>
+        <p:spPr>
+          <a:xfrm>
+            <a:off x="6784848" y="3364992"/>
+            <a:ext cx="73152" cy="475488"/>
+          </a:xfrm>
+          <a:prstGeom prst="rect">
+            <a:avLst/>
+          </a:prstGeom>
+          <a:noFill/>
+          <a:ln/>
+        </p:spPr>
+        <p:txBody>
+          <a:bodyPr wrap="square" lIns="0" tIns="0" rIns="0" bIns="0" rtlCol="0" anchor="ctr"/>
+          <a:lstStyle/>
+          <a:p>
+            <a:pPr algn="ctr" indent="0" marL="0">
+              <a:buNone/>
+            </a:pPr>
+            <a:r>
+              <a:rPr lang="en-US" sz="1600" b="1" dirty="0">
+                <a:solidFill>
+                  <a:srgbClr val="0D9488"/>
+                </a:solidFill>
+                <a:latin typeface="Trebuchet MS" pitchFamily="34" charset="0"/>
+                <a:ea typeface="Trebuchet MS" pitchFamily="34" charset="-122"/>
+                <a:cs typeface="Trebuchet MS" pitchFamily="34" charset="-120"/>
+              </a:rPr>
+              <a:t>·</a:t>
+            </a:r>
+            <a:endParaRPr lang="en-US" sz="1600" dirty="0"/>
+          </a:p>
+        </p:txBody>
+      </p:sp>
+      <p:sp>
+        <p:nvSpPr>
+          <p:cNvPr id="41" name="Shape 39"/>
+          <p:cNvSpPr/>
+          <p:nvPr/>
+        </p:nvSpPr>
+        <p:spPr>
+          <a:xfrm>
+            <a:off x="6858000" y="3364992"/>
+            <a:ext cx="1554480" cy="475488"/>
+          </a:xfrm>
+          <a:prstGeom prst="rect">
+            <a:avLst>
+              <a:gd name="adj" fmla="val 9615"/>
+            </a:avLst>
+          </a:prstGeom>
+          <a:solidFill>
+            <a:srgbClr val="FFFFFF"/>
+          </a:solidFill>
+          <a:ln w="12700">
+            <a:solidFill>
+              <a:srgbClr val="0D9488"/>
+            </a:solidFill>
+            <a:prstDash val="solid"/>
+          </a:ln>
+        </p:spPr>
+      </p:sp>
+      <p:sp>
+        <p:nvSpPr>
+          <p:cNvPr id="42" name="Text 40"/>
+          <p:cNvSpPr/>
+          <p:nvPr/>
+        </p:nvSpPr>
+        <p:spPr>
+          <a:xfrm>
+            <a:off x="6858000" y="3364992"/>
+            <a:ext cx="1554480" cy="475488"/>
+          </a:xfrm>
+          <a:prstGeom prst="rect">
+            <a:avLst/>
+          </a:prstGeom>
+          <a:noFill/>
+          <a:ln/>
+        </p:spPr>
+        <p:txBody>
+          <a:bodyPr wrap="square" lIns="0" tIns="0" rIns="0" bIns="0" rtlCol="0" anchor="ctr"/>
+          <a:lstStyle/>
+          <a:p>
+            <a:pPr algn="ctr" indent="0" marL="0">
+              <a:buNone/>
+            </a:pPr>
+            <a:r>
+              <a:rPr lang="en-US" sz="1400" b="1" dirty="0">
+                <a:solidFill>
+                  <a:srgbClr val="0D9488"/>
+                </a:solidFill>
+                <a:latin typeface="Trebuchet MS" pitchFamily="34" charset="0"/>
+                <a:ea typeface="Trebuchet MS" pitchFamily="34" charset="-122"/>
+                <a:cs typeface="Trebuchet MS" pitchFamily="34" charset="-120"/>
+              </a:rPr>
+              <a:t>tion</a:t>
+            </a:r>
+            <a:endParaRPr lang="en-US" sz="1400" dirty="0"/>
+          </a:p>
+        </p:txBody>
+      </p:sp>
+      <p:sp>
+        <p:nvSpPr>
+          <p:cNvPr id="43" name="Shape 41"/>
           <p:cNvSpPr/>
           <p:nvPr/>
         </p:nvSpPr>
@@ -27779,7 +27791,7 @@
       </p:sp>
       <p:sp>
         <p:nvSpPr>
-          <p:cNvPr id="40" name="Text 38"/>
+          <p:cNvPr id="44" name="Text 42"/>
           <p:cNvSpPr/>
           <p:nvPr/>
         </p:nvSpPr>
@@ -27818,7 +27830,7 @@
       </p:sp>
       <p:sp>
         <p:nvSpPr>
-          <p:cNvPr id="41" name="Shape 39"/>
+          <p:cNvPr id="45" name="Shape 43"/>
           <p:cNvSpPr/>
           <p:nvPr/>
         </p:nvSpPr>
@@ -27845,7 +27857,7 @@
       </p:sp>
       <p:sp>
         <p:nvSpPr>
-          <p:cNvPr id="42" name="Text 40"/>
+          <p:cNvPr id="46" name="Text 44"/>
           <p:cNvSpPr/>
           <p:nvPr/>
         </p:nvSpPr>
@@ -28307,7 +28319,7 @@
                 <a:ea typeface="Trebuchet MS" pitchFamily="34" charset="-122"/>
                 <a:cs typeface="Trebuchet MS" pitchFamily="34" charset="-120"/>
               </a:rPr>
-              <a:t>introduce</a:t>
+              <a:t>education</a:t>
             </a:r>
             <a:endParaRPr lang="en-US" sz="2800" dirty="0"/>
           </a:p>
@@ -28446,7 +28458,7 @@
                 <a:ea typeface="Trebuchet MS" pitchFamily="34" charset="-122"/>
                 <a:cs typeface="Trebuchet MS" pitchFamily="34" charset="-120"/>
               </a:rPr>
-              <a:t>in</a:t>
+              <a:t>e</a:t>
             </a:r>
             <a:endParaRPr lang="en-US" sz="1300" dirty="0"/>
           </a:p>
@@ -28485,7 +28497,7 @@
                 <a:ea typeface="Calibri" pitchFamily="34" charset="-122"/>
                 <a:cs typeface="Calibri" pitchFamily="34" charset="-120"/>
               </a:rPr>
-              <a:t>into</a:t>
+              <a:t>out</a:t>
             </a:r>
             <a:endParaRPr lang="en-US" sz="850" dirty="0"/>
           </a:p>
@@ -28508,11 +28520,11 @@
             </a:avLst>
           </a:prstGeom>
           <a:solidFill>
-            <a:srgbClr val="FCE7F3"/>
+            <a:srgbClr val="CCFBF1"/>
           </a:solidFill>
           <a:ln w="19050">
             <a:solidFill>
-              <a:srgbClr val="DB2777"/>
+              <a:srgbClr val="0D9488"/>
             </a:solidFill>
             <a:prstDash val="solid"/>
           </a:ln>
@@ -28552,13 +28564,13 @@
             <a:r>
               <a:rPr lang="en-US" sz="1300" b="1" dirty="0">
                 <a:solidFill>
-                  <a:srgbClr val="9D174D"/>
+                  <a:srgbClr val="0F766E"/>
                 </a:solidFill>
                 <a:latin typeface="Trebuchet MS" pitchFamily="34" charset="0"/>
                 <a:ea typeface="Trebuchet MS" pitchFamily="34" charset="-122"/>
                 <a:cs typeface="Trebuchet MS" pitchFamily="34" charset="-120"/>
               </a:rPr>
-              <a:t>tro</a:t>
+              <a:t>duc</a:t>
             </a:r>
             <a:endParaRPr lang="en-US" sz="1300" dirty="0"/>
           </a:p>
@@ -28597,7 +28609,7 @@
                 <a:ea typeface="Calibri" pitchFamily="34" charset="-122"/>
                 <a:cs typeface="Calibri" pitchFamily="34" charset="-120"/>
               </a:rPr>
-              <a:t>connecting form</a:t>
+              <a:t>to lead</a:t>
             </a:r>
             <a:endParaRPr lang="en-US" sz="850" dirty="0"/>
           </a:p>
@@ -28620,11 +28632,11 @@
             </a:avLst>
           </a:prstGeom>
           <a:solidFill>
-            <a:srgbClr val="CCFBF1"/>
+            <a:srgbClr val="FCE7F3"/>
           </a:solidFill>
           <a:ln w="19050">
             <a:solidFill>
-              <a:srgbClr val="0D9488"/>
+              <a:srgbClr val="DB2777"/>
             </a:solidFill>
             <a:prstDash val="solid"/>
           </a:ln>
@@ -28664,13 +28676,13 @@
             <a:r>
               <a:rPr lang="en-US" sz="1300" b="1" dirty="0">
                 <a:solidFill>
-                  <a:srgbClr val="0F766E"/>
+                  <a:srgbClr val="9D174D"/>
                 </a:solidFill>
                 <a:latin typeface="Trebuchet MS" pitchFamily="34" charset="0"/>
                 <a:ea typeface="Trebuchet MS" pitchFamily="34" charset="-122"/>
                 <a:cs typeface="Trebuchet MS" pitchFamily="34" charset="-120"/>
               </a:rPr>
-              <a:t>duc</a:t>
+              <a:t>a</a:t>
             </a:r>
             <a:endParaRPr lang="en-US" sz="1300" dirty="0"/>
           </a:p>
@@ -28709,7 +28721,7 @@
                 <a:ea typeface="Calibri" pitchFamily="34" charset="-122"/>
                 <a:cs typeface="Calibri" pitchFamily="34" charset="-120"/>
               </a:rPr>
-              <a:t>to lead</a:t>
+              <a:t>connecting vowel</a:t>
             </a:r>
             <a:endParaRPr lang="en-US" sz="850" dirty="0"/>
           </a:p>
@@ -28717,7 +28729,46 @@
       </p:sp>
       <p:sp>
         <p:nvSpPr>
-          <p:cNvPr id="25" name="Shape 23"/>
+          <p:cNvPr id="25" name="Text 23"/>
+          <p:cNvSpPr/>
+          <p:nvPr/>
+        </p:nvSpPr>
+        <p:spPr>
+          <a:xfrm>
+            <a:off x="5329123" y="2752344"/>
+            <a:ext cx="1581912" cy="182880"/>
+          </a:xfrm>
+          <a:prstGeom prst="rect">
+            <a:avLst/>
+          </a:prstGeom>
+          <a:noFill/>
+          <a:ln/>
+        </p:spPr>
+        <p:txBody>
+          <a:bodyPr wrap="square" lIns="0" tIns="0" rIns="0" bIns="0" rtlCol="0" anchor="t"/>
+          <a:lstStyle/>
+          <a:p>
+            <a:pPr algn="ctr" indent="0" marL="0">
+              <a:buNone/>
+            </a:pPr>
+            <a:r>
+              <a:rPr lang="en-US" sz="700" i="1" dirty="0">
+                <a:solidFill>
+                  <a:srgbClr val="94A3B8"/>
+                </a:solidFill>
+                <a:latin typeface="Calibri" pitchFamily="34" charset="0"/>
+                <a:ea typeface="Calibri" pitchFamily="34" charset="-122"/>
+                <a:cs typeface="Calibri" pitchFamily="34" charset="-120"/>
+              </a:rPr>
+              <a:t>links base to suffix</a:t>
+            </a:r>
+            <a:endParaRPr lang="en-US" sz="700" dirty="0"/>
+          </a:p>
+        </p:txBody>
+      </p:sp>
+      <p:sp>
+        <p:nvSpPr>
+          <p:cNvPr id="26" name="Shape 24"/>
           <p:cNvSpPr/>
           <p:nvPr/>
         </p:nvSpPr>
@@ -28751,7 +28802,7 @@
       </p:sp>
       <p:sp>
         <p:nvSpPr>
-          <p:cNvPr id="26" name="Text 24"/>
+          <p:cNvPr id="27" name="Text 25"/>
           <p:cNvSpPr/>
           <p:nvPr/>
         </p:nvSpPr>
@@ -28782,7 +28833,7 @@
                 <a:ea typeface="Trebuchet MS" pitchFamily="34" charset="-122"/>
                 <a:cs typeface="Trebuchet MS" pitchFamily="34" charset="-120"/>
               </a:rPr>
-              <a:t>e</a:t>
+              <a:t>tion</a:t>
             </a:r>
             <a:endParaRPr lang="en-US" sz="1300" dirty="0"/>
           </a:p>
@@ -28790,7 +28841,7 @@
       </p:sp>
       <p:sp>
         <p:nvSpPr>
-          <p:cNvPr id="27" name="Text 25"/>
+          <p:cNvPr id="28" name="Text 26"/>
           <p:cNvSpPr/>
           <p:nvPr/>
         </p:nvSpPr>
@@ -28821,7 +28872,7 @@
                 <a:ea typeface="Calibri" pitchFamily="34" charset="-122"/>
                 <a:cs typeface="Calibri" pitchFamily="34" charset="-120"/>
               </a:rPr>
-              <a:t>verb-forming suffix</a:t>
+              <a:t>act or process of</a:t>
             </a:r>
             <a:endParaRPr lang="en-US" sz="850" dirty="0"/>
           </a:p>
@@ -28829,7 +28880,7 @@
       </p:sp>
       <p:sp>
         <p:nvSpPr>
-          <p:cNvPr id="28" name="Shape 26"/>
+          <p:cNvPr id="29" name="Shape 27"/>
           <p:cNvSpPr/>
           <p:nvPr/>
         </p:nvSpPr>
@@ -28856,7 +28907,7 @@
       </p:sp>
       <p:sp>
         <p:nvSpPr>
-          <p:cNvPr id="29" name="Text 27"/>
+          <p:cNvPr id="30" name="Text 28"/>
           <p:cNvSpPr/>
           <p:nvPr/>
         </p:nvSpPr>
@@ -28895,7 +28946,7 @@
       </p:sp>
       <p:sp>
         <p:nvSpPr>
-          <p:cNvPr id="30" name="Shape 28"/>
+          <p:cNvPr id="31" name="Shape 29"/>
           <p:cNvSpPr/>
           <p:nvPr/>
         </p:nvSpPr>
@@ -28922,14 +28973,14 @@
       </p:sp>
       <p:sp>
         <p:nvSpPr>
-          <p:cNvPr id="31" name="Shape 29"/>
-          <p:cNvSpPr/>
-          <p:nvPr/>
-        </p:nvSpPr>
-        <p:spPr>
-          <a:xfrm>
-            <a:off x="2313432" y="3364992"/>
-            <a:ext cx="1645920" cy="475488"/>
+          <p:cNvPr id="32" name="Shape 30"/>
+          <p:cNvSpPr/>
+          <p:nvPr/>
+        </p:nvSpPr>
+        <p:spPr>
+          <a:xfrm>
+            <a:off x="1975104" y="3364992"/>
+            <a:ext cx="1554480" cy="475488"/>
           </a:xfrm>
           <a:prstGeom prst="rect">
             <a:avLst>
@@ -28949,14 +29000,14 @@
       </p:sp>
       <p:sp>
         <p:nvSpPr>
-          <p:cNvPr id="32" name="Text 30"/>
-          <p:cNvSpPr/>
-          <p:nvPr/>
-        </p:nvSpPr>
-        <p:spPr>
-          <a:xfrm>
-            <a:off x="2313432" y="3364992"/>
-            <a:ext cx="1645920" cy="475488"/>
+          <p:cNvPr id="33" name="Text 31"/>
+          <p:cNvSpPr/>
+          <p:nvPr/>
+        </p:nvSpPr>
+        <p:spPr>
+          <a:xfrm>
+            <a:off x="1975104" y="3364992"/>
+            <a:ext cx="1554480" cy="475488"/>
           </a:xfrm>
           <a:prstGeom prst="rect">
             <a:avLst/>
@@ -28980,7 +29031,7 @@
                 <a:ea typeface="Trebuchet MS" pitchFamily="34" charset="-122"/>
                 <a:cs typeface="Trebuchet MS" pitchFamily="34" charset="-120"/>
               </a:rPr>
-              <a:t>in</a:t>
+              <a:t>ed</a:t>
             </a:r>
             <a:endParaRPr lang="en-US" sz="1400" dirty="0"/>
           </a:p>
@@ -28988,14 +29039,14 @@
       </p:sp>
       <p:sp>
         <p:nvSpPr>
-          <p:cNvPr id="33" name="Text 31"/>
-          <p:cNvSpPr/>
-          <p:nvPr/>
-        </p:nvSpPr>
-        <p:spPr>
-          <a:xfrm>
-            <a:off x="3959352" y="3364992"/>
-            <a:ext cx="411480" cy="475488"/>
+          <p:cNvPr id="34" name="Text 32"/>
+          <p:cNvSpPr/>
+          <p:nvPr/>
+        </p:nvSpPr>
+        <p:spPr>
+          <a:xfrm>
+            <a:off x="3529584" y="3364992"/>
+            <a:ext cx="73152" cy="475488"/>
           </a:xfrm>
           <a:prstGeom prst="rect">
             <a:avLst/>
@@ -29027,14 +29078,14 @@
       </p:sp>
       <p:sp>
         <p:nvSpPr>
-          <p:cNvPr id="34" name="Shape 32"/>
-          <p:cNvSpPr/>
-          <p:nvPr/>
-        </p:nvSpPr>
-        <p:spPr>
-          <a:xfrm>
-            <a:off x="4370832" y="3364992"/>
-            <a:ext cx="1645920" cy="475488"/>
+          <p:cNvPr id="35" name="Shape 33"/>
+          <p:cNvSpPr/>
+          <p:nvPr/>
+        </p:nvSpPr>
+        <p:spPr>
+          <a:xfrm>
+            <a:off x="3602736" y="3364992"/>
+            <a:ext cx="1554480" cy="475488"/>
           </a:xfrm>
           <a:prstGeom prst="rect">
             <a:avLst>
@@ -29054,14 +29105,14 @@
       </p:sp>
       <p:sp>
         <p:nvSpPr>
-          <p:cNvPr id="35" name="Text 33"/>
-          <p:cNvSpPr/>
-          <p:nvPr/>
-        </p:nvSpPr>
-        <p:spPr>
-          <a:xfrm>
-            <a:off x="4370832" y="3364992"/>
-            <a:ext cx="1645920" cy="475488"/>
+          <p:cNvPr id="36" name="Text 34"/>
+          <p:cNvSpPr/>
+          <p:nvPr/>
+        </p:nvSpPr>
+        <p:spPr>
+          <a:xfrm>
+            <a:off x="3602736" y="3364992"/>
+            <a:ext cx="1554480" cy="475488"/>
           </a:xfrm>
           <a:prstGeom prst="rect">
             <a:avLst/>
@@ -29085,7 +29136,7 @@
                 <a:ea typeface="Trebuchet MS" pitchFamily="34" charset="-122"/>
                 <a:cs typeface="Trebuchet MS" pitchFamily="34" charset="-120"/>
               </a:rPr>
-              <a:t>tro</a:t>
+              <a:t>u</a:t>
             </a:r>
             <a:endParaRPr lang="en-US" sz="1400" dirty="0"/>
           </a:p>
@@ -29093,14 +29144,14 @@
       </p:sp>
       <p:sp>
         <p:nvSpPr>
-          <p:cNvPr id="36" name="Text 34"/>
-          <p:cNvSpPr/>
-          <p:nvPr/>
-        </p:nvSpPr>
-        <p:spPr>
-          <a:xfrm>
-            <a:off x="6016752" y="3364992"/>
-            <a:ext cx="411480" cy="475488"/>
+          <p:cNvPr id="37" name="Text 35"/>
+          <p:cNvSpPr/>
+          <p:nvPr/>
+        </p:nvSpPr>
+        <p:spPr>
+          <a:xfrm>
+            <a:off x="5157216" y="3364992"/>
+            <a:ext cx="73152" cy="475488"/>
           </a:xfrm>
           <a:prstGeom prst="rect">
             <a:avLst/>
@@ -29132,14 +29183,14 @@
       </p:sp>
       <p:sp>
         <p:nvSpPr>
-          <p:cNvPr id="37" name="Shape 35"/>
-          <p:cNvSpPr/>
-          <p:nvPr/>
-        </p:nvSpPr>
-        <p:spPr>
-          <a:xfrm>
-            <a:off x="6428232" y="3364992"/>
-            <a:ext cx="1645920" cy="475488"/>
+          <p:cNvPr id="38" name="Shape 36"/>
+          <p:cNvSpPr/>
+          <p:nvPr/>
+        </p:nvSpPr>
+        <p:spPr>
+          <a:xfrm>
+            <a:off x="5230368" y="3364992"/>
+            <a:ext cx="1554480" cy="475488"/>
           </a:xfrm>
           <a:prstGeom prst="rect">
             <a:avLst>
@@ -29159,14 +29210,14 @@
       </p:sp>
       <p:sp>
         <p:nvSpPr>
-          <p:cNvPr id="38" name="Text 36"/>
-          <p:cNvSpPr/>
-          <p:nvPr/>
-        </p:nvSpPr>
-        <p:spPr>
-          <a:xfrm>
-            <a:off x="6428232" y="3364992"/>
-            <a:ext cx="1645920" cy="475488"/>
+          <p:cNvPr id="39" name="Text 37"/>
+          <p:cNvSpPr/>
+          <p:nvPr/>
+        </p:nvSpPr>
+        <p:spPr>
+          <a:xfrm>
+            <a:off x="5230368" y="3364992"/>
+            <a:ext cx="1554480" cy="475488"/>
           </a:xfrm>
           <a:prstGeom prst="rect">
             <a:avLst/>
@@ -29190,7 +29241,7 @@
                 <a:ea typeface="Trebuchet MS" pitchFamily="34" charset="-122"/>
                 <a:cs typeface="Trebuchet MS" pitchFamily="34" charset="-120"/>
               </a:rPr>
-              <a:t>duce</a:t>
+              <a:t>ca</a:t>
             </a:r>
             <a:endParaRPr lang="en-US" sz="1400" dirty="0"/>
           </a:p>
@@ -29198,7 +29249,112 @@
       </p:sp>
       <p:sp>
         <p:nvSpPr>
-          <p:cNvPr id="39" name="Shape 37"/>
+          <p:cNvPr id="40" name="Text 38"/>
+          <p:cNvSpPr/>
+          <p:nvPr/>
+        </p:nvSpPr>
+        <p:spPr>
+          <a:xfrm>
+            <a:off x="6784848" y="3364992"/>
+            <a:ext cx="73152" cy="475488"/>
+          </a:xfrm>
+          <a:prstGeom prst="rect">
+            <a:avLst/>
+          </a:prstGeom>
+          <a:noFill/>
+          <a:ln/>
+        </p:spPr>
+        <p:txBody>
+          <a:bodyPr wrap="square" lIns="0" tIns="0" rIns="0" bIns="0" rtlCol="0" anchor="ctr"/>
+          <a:lstStyle/>
+          <a:p>
+            <a:pPr algn="ctr" indent="0" marL="0">
+              <a:buNone/>
+            </a:pPr>
+            <a:r>
+              <a:rPr lang="en-US" sz="1600" b="1" dirty="0">
+                <a:solidFill>
+                  <a:srgbClr val="0D9488"/>
+                </a:solidFill>
+                <a:latin typeface="Trebuchet MS" pitchFamily="34" charset="0"/>
+                <a:ea typeface="Trebuchet MS" pitchFamily="34" charset="-122"/>
+                <a:cs typeface="Trebuchet MS" pitchFamily="34" charset="-120"/>
+              </a:rPr>
+              <a:t>·</a:t>
+            </a:r>
+            <a:endParaRPr lang="en-US" sz="1600" dirty="0"/>
+          </a:p>
+        </p:txBody>
+      </p:sp>
+      <p:sp>
+        <p:nvSpPr>
+          <p:cNvPr id="41" name="Shape 39"/>
+          <p:cNvSpPr/>
+          <p:nvPr/>
+        </p:nvSpPr>
+        <p:spPr>
+          <a:xfrm>
+            <a:off x="6858000" y="3364992"/>
+            <a:ext cx="1554480" cy="475488"/>
+          </a:xfrm>
+          <a:prstGeom prst="rect">
+            <a:avLst>
+              <a:gd name="adj" fmla="val 9615"/>
+            </a:avLst>
+          </a:prstGeom>
+          <a:solidFill>
+            <a:srgbClr val="FFFFFF"/>
+          </a:solidFill>
+          <a:ln w="12700">
+            <a:solidFill>
+              <a:srgbClr val="0D9488"/>
+            </a:solidFill>
+            <a:prstDash val="solid"/>
+          </a:ln>
+        </p:spPr>
+      </p:sp>
+      <p:sp>
+        <p:nvSpPr>
+          <p:cNvPr id="42" name="Text 40"/>
+          <p:cNvSpPr/>
+          <p:nvPr/>
+        </p:nvSpPr>
+        <p:spPr>
+          <a:xfrm>
+            <a:off x="6858000" y="3364992"/>
+            <a:ext cx="1554480" cy="475488"/>
+          </a:xfrm>
+          <a:prstGeom prst="rect">
+            <a:avLst/>
+          </a:prstGeom>
+          <a:noFill/>
+          <a:ln/>
+        </p:spPr>
+        <p:txBody>
+          <a:bodyPr wrap="square" lIns="0" tIns="0" rIns="0" bIns="0" rtlCol="0" anchor="ctr"/>
+          <a:lstStyle/>
+          <a:p>
+            <a:pPr algn="ctr" indent="0" marL="0">
+              <a:buNone/>
+            </a:pPr>
+            <a:r>
+              <a:rPr lang="en-US" sz="1400" b="1" dirty="0">
+                <a:solidFill>
+                  <a:srgbClr val="0D9488"/>
+                </a:solidFill>
+                <a:latin typeface="Trebuchet MS" pitchFamily="34" charset="0"/>
+                <a:ea typeface="Trebuchet MS" pitchFamily="34" charset="-122"/>
+                <a:cs typeface="Trebuchet MS" pitchFamily="34" charset="-120"/>
+              </a:rPr>
+              <a:t>tion</a:t>
+            </a:r>
+            <a:endParaRPr lang="en-US" sz="1400" dirty="0"/>
+          </a:p>
+        </p:txBody>
+      </p:sp>
+      <p:sp>
+        <p:nvSpPr>
+          <p:cNvPr id="43" name="Shape 41"/>
           <p:cNvSpPr/>
           <p:nvPr/>
         </p:nvSpPr>
@@ -29225,7 +29381,7 @@
       </p:sp>
       <p:sp>
         <p:nvSpPr>
-          <p:cNvPr id="40" name="Text 38"/>
+          <p:cNvPr id="44" name="Text 42"/>
           <p:cNvSpPr/>
           <p:nvPr/>
         </p:nvSpPr>
@@ -29264,7 +29420,7 @@
       </p:sp>
       <p:sp>
         <p:nvSpPr>
-          <p:cNvPr id="41" name="Shape 39"/>
+          <p:cNvPr id="45" name="Shape 43"/>
           <p:cNvSpPr/>
           <p:nvPr/>
         </p:nvSpPr>
@@ -29291,7 +29447,7 @@
       </p:sp>
       <p:sp>
         <p:nvSpPr>
-          <p:cNvPr id="42" name="Shape 40"/>
+          <p:cNvPr id="46" name="Shape 44"/>
           <p:cNvSpPr/>
           <p:nvPr/>
         </p:nvSpPr>
@@ -29318,7 +29474,7 @@
       </p:sp>
       <p:sp>
         <p:nvSpPr>
-          <p:cNvPr id="43" name="Text 41"/>
+          <p:cNvPr id="47" name="Text 45"/>
           <p:cNvSpPr/>
           <p:nvPr/>
         </p:nvSpPr>
@@ -29349,7 +29505,7 @@
                 <a:ea typeface="Trebuchet MS" pitchFamily="34" charset="-122"/>
                 <a:cs typeface="Trebuchet MS" pitchFamily="34" charset="-120"/>
               </a:rPr>
-              <a:t>i</a:t>
+              <a:t>e</a:t>
             </a:r>
             <a:endParaRPr lang="en-US" sz="900" dirty="0"/>
           </a:p>
@@ -29357,7 +29513,7 @@
       </p:sp>
       <p:sp>
         <p:nvSpPr>
-          <p:cNvPr id="44" name="Shape 42"/>
+          <p:cNvPr id="48" name="Shape 46"/>
           <p:cNvSpPr/>
           <p:nvPr/>
         </p:nvSpPr>
@@ -29384,7 +29540,7 @@
       </p:sp>
       <p:sp>
         <p:nvSpPr>
-          <p:cNvPr id="45" name="Text 43"/>
+          <p:cNvPr id="49" name="Text 47"/>
           <p:cNvSpPr/>
           <p:nvPr/>
         </p:nvSpPr>
@@ -29415,7 +29571,7 @@
                 <a:ea typeface="Trebuchet MS" pitchFamily="34" charset="-122"/>
                 <a:cs typeface="Trebuchet MS" pitchFamily="34" charset="-120"/>
               </a:rPr>
-              <a:t>n</a:t>
+              <a:t>d</a:t>
             </a:r>
             <a:endParaRPr lang="en-US" sz="900" dirty="0"/>
           </a:p>
@@ -29423,7 +29579,7 @@
       </p:sp>
       <p:sp>
         <p:nvSpPr>
-          <p:cNvPr id="46" name="Shape 44"/>
+          <p:cNvPr id="50" name="Shape 48"/>
           <p:cNvSpPr/>
           <p:nvPr/>
         </p:nvSpPr>
@@ -29450,7 +29606,7 @@
       </p:sp>
       <p:sp>
         <p:nvSpPr>
-          <p:cNvPr id="47" name="Text 45"/>
+          <p:cNvPr id="51" name="Text 49"/>
           <p:cNvSpPr/>
           <p:nvPr/>
         </p:nvSpPr>
@@ -29481,7 +29637,7 @@
                 <a:ea typeface="Trebuchet MS" pitchFamily="34" charset="-122"/>
                 <a:cs typeface="Trebuchet MS" pitchFamily="34" charset="-120"/>
               </a:rPr>
-              <a:t>t</a:t>
+              <a:t>u</a:t>
             </a:r>
             <a:endParaRPr lang="en-US" sz="900" dirty="0"/>
           </a:p>
@@ -29489,7 +29645,7 @@
       </p:sp>
       <p:sp>
         <p:nvSpPr>
-          <p:cNvPr id="48" name="Shape 46"/>
+          <p:cNvPr id="52" name="Shape 50"/>
           <p:cNvSpPr/>
           <p:nvPr/>
         </p:nvSpPr>
@@ -29516,7 +29672,7 @@
       </p:sp>
       <p:sp>
         <p:nvSpPr>
-          <p:cNvPr id="49" name="Text 47"/>
+          <p:cNvPr id="53" name="Text 51"/>
           <p:cNvSpPr/>
           <p:nvPr/>
         </p:nvSpPr>
@@ -29547,7 +29703,7 @@
                 <a:ea typeface="Trebuchet MS" pitchFamily="34" charset="-122"/>
                 <a:cs typeface="Trebuchet MS" pitchFamily="34" charset="-120"/>
               </a:rPr>
-              <a:t>r</a:t>
+              <a:t>c</a:t>
             </a:r>
             <a:endParaRPr lang="en-US" sz="900" dirty="0"/>
           </a:p>
@@ -29555,7 +29711,46 @@
       </p:sp>
       <p:sp>
         <p:nvSpPr>
-          <p:cNvPr id="50" name="Shape 48"/>
+          <p:cNvPr id="54" name="Text 52"/>
+          <p:cNvSpPr/>
+          <p:nvPr/>
+        </p:nvSpPr>
+        <p:spPr>
+          <a:xfrm>
+            <a:off x="4447032" y="4572000"/>
+            <a:ext cx="685800" cy="219456"/>
+          </a:xfrm>
+          <a:prstGeom prst="rect">
+            <a:avLst/>
+          </a:prstGeom>
+          <a:noFill/>
+          <a:ln/>
+        </p:spPr>
+        <p:txBody>
+          <a:bodyPr wrap="square" lIns="0" tIns="0" rIns="0" bIns="0" rtlCol="0" anchor="t"/>
+          <a:lstStyle/>
+          <a:p>
+            <a:pPr algn="ctr" indent="0" marL="0">
+              <a:buNone/>
+            </a:pPr>
+            <a:r>
+              <a:rPr lang="en-US" sz="750" i="1" dirty="0">
+                <a:solidFill>
+                  <a:srgbClr val="94A3B8"/>
+                </a:solidFill>
+                <a:latin typeface="Calibri" pitchFamily="34" charset="0"/>
+                <a:ea typeface="Calibri" pitchFamily="34" charset="-122"/>
+                <a:cs typeface="Calibri" pitchFamily="34" charset="-120"/>
+              </a:rPr>
+              <a:t>/k/</a:t>
+            </a:r>
+            <a:endParaRPr lang="en-US" sz="750" dirty="0"/>
+          </a:p>
+        </p:txBody>
+      </p:sp>
+      <p:sp>
+        <p:nvSpPr>
+          <p:cNvPr id="55" name="Shape 53"/>
           <p:cNvSpPr/>
           <p:nvPr/>
         </p:nvSpPr>
@@ -29582,7 +29777,7 @@
       </p:sp>
       <p:sp>
         <p:nvSpPr>
-          <p:cNvPr id="51" name="Text 49"/>
+          <p:cNvPr id="56" name="Text 54"/>
           <p:cNvSpPr/>
           <p:nvPr/>
         </p:nvSpPr>
@@ -29613,7 +29808,7 @@
                 <a:ea typeface="Trebuchet MS" pitchFamily="34" charset="-122"/>
                 <a:cs typeface="Trebuchet MS" pitchFamily="34" charset="-120"/>
               </a:rPr>
-              <a:t>o</a:t>
+              <a:t>a</a:t>
             </a:r>
             <a:endParaRPr lang="en-US" sz="900" dirty="0"/>
           </a:p>
@@ -29621,7 +29816,7 @@
       </p:sp>
       <p:sp>
         <p:nvSpPr>
-          <p:cNvPr id="52" name="Shape 50"/>
+          <p:cNvPr id="57" name="Shape 55"/>
           <p:cNvSpPr/>
           <p:nvPr/>
         </p:nvSpPr>
@@ -29648,7 +29843,7 @@
       </p:sp>
       <p:sp>
         <p:nvSpPr>
-          <p:cNvPr id="53" name="Text 51"/>
+          <p:cNvPr id="58" name="Text 56"/>
           <p:cNvSpPr/>
           <p:nvPr/>
         </p:nvSpPr>
@@ -29679,7 +29874,7 @@
                 <a:ea typeface="Trebuchet MS" pitchFamily="34" charset="-122"/>
                 <a:cs typeface="Trebuchet MS" pitchFamily="34" charset="-120"/>
               </a:rPr>
-              <a:t>d</a:t>
+              <a:t>t</a:t>
             </a:r>
             <a:endParaRPr lang="en-US" sz="900" dirty="0"/>
           </a:p>
@@ -29687,7 +29882,46 @@
       </p:sp>
       <p:sp>
         <p:nvSpPr>
-          <p:cNvPr id="54" name="Shape 52"/>
+          <p:cNvPr id="59" name="Text 57"/>
+          <p:cNvSpPr/>
+          <p:nvPr/>
+        </p:nvSpPr>
+        <p:spPr>
+          <a:xfrm>
+            <a:off x="6062472" y="4572000"/>
+            <a:ext cx="685800" cy="219456"/>
+          </a:xfrm>
+          <a:prstGeom prst="rect">
+            <a:avLst/>
+          </a:prstGeom>
+          <a:noFill/>
+          <a:ln/>
+        </p:spPr>
+        <p:txBody>
+          <a:bodyPr wrap="square" lIns="0" tIns="0" rIns="0" bIns="0" rtlCol="0" anchor="t"/>
+          <a:lstStyle/>
+          <a:p>
+            <a:pPr algn="ctr" indent="0" marL="0">
+              <a:buNone/>
+            </a:pPr>
+            <a:r>
+              <a:rPr lang="en-US" sz="750" i="1" dirty="0">
+                <a:solidFill>
+                  <a:srgbClr val="94A3B8"/>
+                </a:solidFill>
+                <a:latin typeface="Calibri" pitchFamily="34" charset="0"/>
+                <a:ea typeface="Calibri" pitchFamily="34" charset="-122"/>
+                <a:cs typeface="Calibri" pitchFamily="34" charset="-120"/>
+              </a:rPr>
+              <a:t>/sh/</a:t>
+            </a:r>
+            <a:endParaRPr lang="en-US" sz="750" dirty="0"/>
+          </a:p>
+        </p:txBody>
+      </p:sp>
+      <p:sp>
+        <p:nvSpPr>
+          <p:cNvPr id="60" name="Shape 58"/>
           <p:cNvSpPr/>
           <p:nvPr/>
         </p:nvSpPr>
@@ -29714,7 +29948,7 @@
       </p:sp>
       <p:sp>
         <p:nvSpPr>
-          <p:cNvPr id="55" name="Text 53"/>
+          <p:cNvPr id="61" name="Text 59"/>
           <p:cNvSpPr/>
           <p:nvPr/>
         </p:nvSpPr>
@@ -29745,7 +29979,7 @@
                 <a:ea typeface="Trebuchet MS" pitchFamily="34" charset="-122"/>
                 <a:cs typeface="Trebuchet MS" pitchFamily="34" charset="-120"/>
               </a:rPr>
-              <a:t>u</a:t>
+              <a:t>io</a:t>
             </a:r>
             <a:endParaRPr lang="en-US" sz="900" dirty="0"/>
           </a:p>
@@ -29753,7 +29987,7 @@
       </p:sp>
       <p:sp>
         <p:nvSpPr>
-          <p:cNvPr id="56" name="Shape 54"/>
+          <p:cNvPr id="62" name="Shape 60"/>
           <p:cNvSpPr/>
           <p:nvPr/>
         </p:nvSpPr>
@@ -29780,7 +30014,7 @@
       </p:sp>
       <p:sp>
         <p:nvSpPr>
-          <p:cNvPr id="57" name="Text 55"/>
+          <p:cNvPr id="63" name="Text 61"/>
           <p:cNvSpPr/>
           <p:nvPr/>
         </p:nvSpPr>
@@ -29811,48 +30045,9 @@
                 <a:ea typeface="Trebuchet MS" pitchFamily="34" charset="-122"/>
                 <a:cs typeface="Trebuchet MS" pitchFamily="34" charset="-120"/>
               </a:rPr>
-              <a:t>ce</a:t>
+              <a:t>n</a:t>
             </a:r>
             <a:endParaRPr lang="en-US" sz="900" dirty="0"/>
-          </a:p>
-        </p:txBody>
-      </p:sp>
-      <p:sp>
-        <p:nvSpPr>
-          <p:cNvPr id="58" name="Text 56"/>
-          <p:cNvSpPr/>
-          <p:nvPr/>
-        </p:nvSpPr>
-        <p:spPr>
-          <a:xfrm>
-            <a:off x="7677912" y="4572000"/>
-            <a:ext cx="685800" cy="219456"/>
-          </a:xfrm>
-          <a:prstGeom prst="rect">
-            <a:avLst/>
-          </a:prstGeom>
-          <a:noFill/>
-          <a:ln/>
-        </p:spPr>
-        <p:txBody>
-          <a:bodyPr wrap="square" lIns="0" tIns="0" rIns="0" bIns="0" rtlCol="0" anchor="t"/>
-          <a:lstStyle/>
-          <a:p>
-            <a:pPr algn="ctr" indent="0" marL="0">
-              <a:buNone/>
-            </a:pPr>
-            <a:r>
-              <a:rPr lang="en-US" sz="750" i="1" dirty="0">
-                <a:solidFill>
-                  <a:srgbClr val="94A3B8"/>
-                </a:solidFill>
-                <a:latin typeface="Calibri" pitchFamily="34" charset="0"/>
-                <a:ea typeface="Calibri" pitchFamily="34" charset="-122"/>
-                <a:cs typeface="Calibri" pitchFamily="34" charset="-120"/>
-              </a:rPr>
-              <a:t>/s/</a:t>
-            </a:r>
-            <a:endParaRPr lang="en-US" sz="750" dirty="0"/>
           </a:p>
         </p:txBody>
       </p:sp>
@@ -36758,7 +36953,7 @@
                 <a:ea typeface="Trebuchet MS" pitchFamily="34" charset="-122"/>
                 <a:cs typeface="Trebuchet MS" pitchFamily="34" charset="-120"/>
               </a:rPr>
-              <a:t>-e</a:t>
+              <a:t>-tive</a:t>
             </a:r>
             <a:endParaRPr lang="en-US" sz="1300" dirty="0"/>
           </a:p>
@@ -36911,7 +37106,7 @@
                 <a:ea typeface="Trebuchet MS" pitchFamily="34" charset="-122"/>
                 <a:cs typeface="Trebuchet MS" pitchFamily="34" charset="-120"/>
               </a:rPr>
-              <a:t>-tive</a:t>
+              <a:t>-ed</a:t>
             </a:r>
             <a:endParaRPr lang="en-US" sz="1300" dirty="0"/>
           </a:p>
@@ -37064,7 +37259,7 @@
                 <a:ea typeface="Trebuchet MS" pitchFamily="34" charset="-122"/>
                 <a:cs typeface="Trebuchet MS" pitchFamily="34" charset="-120"/>
               </a:rPr>
-              <a:t>-tion</a:t>
+              <a:t>-e</a:t>
             </a:r>
             <a:endParaRPr lang="en-US" sz="1300" dirty="0"/>
           </a:p>
@@ -37499,7 +37694,7 @@
                 <a:ea typeface="Trebuchet MS" pitchFamily="34" charset="-122"/>
                 <a:cs typeface="Trebuchet MS" pitchFamily="34" charset="-120"/>
               </a:rPr>
-              <a:t>deduct</a:t>
+              <a:t>deduce</a:t>
             </a:r>
             <a:endParaRPr lang="en-US" sz="1200" dirty="0"/>
           </a:p>
@@ -38819,7 +39014,7 @@
                 <a:ea typeface="Calibri" pitchFamily="34" charset="-122"/>
                 <a:cs typeface="Calibri" pitchFamily="34" charset="-120"/>
               </a:rPr>
-              <a:t>1.  The root 'duc' comes from Latin and means to lead or bring.</a:t>
+              <a:t>1.  The prefix 're' in 'reduce' means again or back.</a:t>
             </a:r>
             <a:endParaRPr lang="en-US" sz="1300" dirty="0"/>
           </a:p>
@@ -38958,7 +39153,7 @@
                 <a:ea typeface="Calibri" pitchFamily="34" charset="-122"/>
                 <a:cs typeface="Calibri" pitchFamily="34" charset="-120"/>
               </a:rPr>
-              <a:t>2.  The word 'reduce' means to make something bigger.</a:t>
+              <a:t>2.  The word 'aqueduct' contains the root 'duc'.</a:t>
             </a:r>
             <a:endParaRPr lang="en-US" sz="1300" dirty="0"/>
           </a:p>
@@ -38981,11 +39176,11 @@
             </a:avLst>
           </a:prstGeom>
           <a:solidFill>
-            <a:srgbClr val="FEE2E2"/>
-          </a:solidFill>
-          <a:ln w="12700">
-            <a:solidFill>
-              <a:srgbClr val="DC2626"/>
+            <a:srgbClr val="DCFCE7"/>
+          </a:solidFill>
+          <a:ln w="12700">
+            <a:solidFill>
+              <a:srgbClr val="16A34A"/>
             </a:solidFill>
             <a:prstDash val="solid"/>
           </a:ln>
@@ -39018,13 +39213,13 @@
             <a:r>
               <a:rPr lang="en-US" sz="1100" b="1" dirty="0">
                 <a:solidFill>
-                  <a:srgbClr val="DC2626"/>
+                  <a:srgbClr val="16A34A"/>
                 </a:solidFill>
                 <a:latin typeface="Trebuchet MS" pitchFamily="34" charset="0"/>
                 <a:ea typeface="Trebuchet MS" pitchFamily="34" charset="-122"/>
                 <a:cs typeface="Trebuchet MS" pitchFamily="34" charset="-120"/>
               </a:rPr>
-              <a:t>FALSE</a:t>
+              <a:t>TRUE</a:t>
             </a:r>
             <a:endParaRPr lang="en-US" sz="1100" dirty="0"/>
           </a:p>
@@ -39097,7 +39292,7 @@
                 <a:ea typeface="Calibri" pitchFamily="34" charset="-122"/>
                 <a:cs typeface="Calibri" pitchFamily="34" charset="-120"/>
               </a:rPr>
-              <a:t>3.  The word 'aqueduct' contains the root 'duc'.</a:t>
+              <a:t>3.  The word 'reduce' means to make something bigger or larger.</a:t>
             </a:r>
             <a:endParaRPr lang="en-US" sz="1300" dirty="0"/>
           </a:p>
@@ -39120,11 +39315,11 @@
             </a:avLst>
           </a:prstGeom>
           <a:solidFill>
-            <a:srgbClr val="DCFCE7"/>
-          </a:solidFill>
-          <a:ln w="12700">
-            <a:solidFill>
-              <a:srgbClr val="16A34A"/>
+            <a:srgbClr val="FEE2E2"/>
+          </a:solidFill>
+          <a:ln w="12700">
+            <a:solidFill>
+              <a:srgbClr val="DC2626"/>
             </a:solidFill>
             <a:prstDash val="solid"/>
           </a:ln>
@@ -39157,13 +39352,13 @@
             <a:r>
               <a:rPr lang="en-US" sz="1100" b="1" dirty="0">
                 <a:solidFill>
-                  <a:srgbClr val="16A34A"/>
+                  <a:srgbClr val="DC2626"/>
                 </a:solidFill>
                 <a:latin typeface="Trebuchet MS" pitchFamily="34" charset="0"/>
                 <a:ea typeface="Trebuchet MS" pitchFamily="34" charset="-122"/>
                 <a:cs typeface="Trebuchet MS" pitchFamily="34" charset="-120"/>
               </a:rPr>
-              <a:t>TRUE</a:t>
+              <a:t>FALSE</a:t>
             </a:r>
             <a:endParaRPr lang="en-US" sz="1100" dirty="0"/>
           </a:p>
@@ -39236,7 +39431,7 @@
                 <a:ea typeface="Calibri" pitchFamily="34" charset="-122"/>
                 <a:cs typeface="Calibri" pitchFamily="34" charset="-120"/>
               </a:rPr>
-              <a:t>4.  A conductor is someone who leads a group of musicians.</a:t>
+              <a:t>4.  The root 'duc' comes from a Latin word meaning to lead or bring.</a:t>
             </a:r>
             <a:endParaRPr lang="en-US" sz="1300" dirty="0"/>
           </a:p>
@@ -39375,7 +39570,7 @@
                 <a:ea typeface="Calibri" pitchFamily="34" charset="-122"/>
                 <a:cs typeface="Calibri" pitchFamily="34" charset="-120"/>
               </a:rPr>
-              <a:t>5.  The root 'duc' comes from Greek.</a:t>
+              <a:t>5.  The root 'duc' originally came from a Greek word.</a:t>
             </a:r>
             <a:endParaRPr lang="en-US" sz="1300" dirty="0"/>
           </a:p>
@@ -40344,7 +40539,7 @@
                 <a:ea typeface="Trebuchet MS" pitchFamily="34" charset="-122"/>
                 <a:cs typeface="Trebuchet MS" pitchFamily="34" charset="-120"/>
               </a:rPr>
-              <a:t>deduct</a:t>
+              <a:t>deduce</a:t>
             </a:r>
             <a:endParaRPr lang="en-US" sz="1300" dirty="0"/>
           </a:p>
@@ -41437,7 +41632,7 @@
                 <a:ea typeface="Trebuchet MS" pitchFamily="34" charset="-122"/>
                 <a:cs typeface="Trebuchet MS" pitchFamily="34" charset="-120"/>
               </a:rPr>
-              <a:t>-e</a:t>
+              <a:t>-tive</a:t>
             </a:r>
             <a:endParaRPr lang="en-US" sz="1300" dirty="0"/>
           </a:p>
@@ -41590,7 +41785,7 @@
                 <a:ea typeface="Trebuchet MS" pitchFamily="34" charset="-122"/>
                 <a:cs typeface="Trebuchet MS" pitchFamily="34" charset="-120"/>
               </a:rPr>
-              <a:t>-tive</a:t>
+              <a:t>-ed</a:t>
             </a:r>
             <a:endParaRPr lang="en-US" sz="1300" dirty="0"/>
           </a:p>
@@ -41743,7 +41938,7 @@
                 <a:ea typeface="Trebuchet MS" pitchFamily="34" charset="-122"/>
                 <a:cs typeface="Trebuchet MS" pitchFamily="34" charset="-120"/>
               </a:rPr>
-              <a:t>-tion</a:t>
+              <a:t>-e</a:t>
             </a:r>
             <a:endParaRPr lang="en-US" sz="1300" dirty="0"/>
           </a:p>
@@ -42654,7 +42849,7 @@
                 <a:ea typeface="Calibri" pitchFamily="34" charset="-122"/>
                 <a:cs typeface="Calibri" pitchFamily="34" charset="-120"/>
               </a:rPr>
-              <a:t>To teach and lead someone's mind so they learn new things.</a:t>
+              <a:t>To teach and train someone so they can learn new things.</a:t>
             </a:r>
             <a:endParaRPr lang="en-US" sz="1200" dirty="0"/>
           </a:p>
@@ -42793,7 +42988,7 @@
                 <a:ea typeface="Calibri" pitchFamily="34" charset="-122"/>
                 <a:cs typeface="Calibri" pitchFamily="34" charset="-120"/>
               </a:rPr>
-              <a:t>To officially bring someone into a group or organisation.</a:t>
+              <a:t>To officially bring someone into a group or position.</a:t>
             </a:r>
             <a:endParaRPr lang="en-US" sz="1200" dirty="0"/>
           </a:p>
@@ -42932,7 +43127,7 @@
                 <a:ea typeface="Calibri" pitchFamily="34" charset="-122"/>
                 <a:cs typeface="Calibri" pitchFamily="34" charset="-120"/>
               </a:rPr>
-              <a:t>To make or create something, like a factory that produces toys.</a:t>
+              <a:t>To make or create something, like a farmer producing vegetables.</a:t>
             </a:r>
             <a:endParaRPr lang="en-US" sz="1200" dirty="0"/>
           </a:p>
@@ -43071,7 +43266,7 @@
                 <a:ea typeface="Calibri" pitchFamily="34" charset="-122"/>
                 <a:cs typeface="Calibri" pitchFamily="34" charset="-120"/>
               </a:rPr>
-              <a:t>To take away an amount from a total, like deducting points in a game.</a:t>
+              <a:t>To work out the answer by thinking carefully about the clues you have.</a:t>
             </a:r>
             <a:endParaRPr lang="en-US" sz="1200" dirty="0"/>
           </a:p>
@@ -43283,7 +43478,7 @@
                 <a:ea typeface="Trebuchet MS" pitchFamily="34" charset="-122"/>
                 <a:cs typeface="Trebuchet MS" pitchFamily="34" charset="-120"/>
               </a:rPr>
-              <a:t>deduct</a:t>
+              <a:t>deduce</a:t>
             </a:r>
             <a:endParaRPr lang="en-US" sz="1200" dirty="0"/>
           </a:p>
@@ -43349,7 +43544,7 @@
                 <a:ea typeface="Calibri" pitchFamily="34" charset="-122"/>
                 <a:cs typeface="Calibri" pitchFamily="34" charset="-120"/>
               </a:rPr>
-              <a:t>To lead or guide something, like a conductor leading an orchestra.</a:t>
+              <a:t>To lead or guide something, like conducting an orchestra or an experiment.</a:t>
             </a:r>
             <a:endParaRPr lang="en-US" sz="1200" dirty="0"/>
           </a:p>
@@ -43983,7 +44178,7 @@
                 <a:ea typeface="Calibri" pitchFamily="34" charset="-122"/>
                 <a:cs typeface="Calibri" pitchFamily="34" charset="-120"/>
               </a:rPr>
-              <a:t>The science teacher asked us to conduct an experiment to see which material absorbs the most water.</a:t>
+              <a:t>The science teacher asked us to deduce which liquid was water by observing each one carefully.</a:t>
             </a:r>
             <a:endParaRPr lang="en-US" sz="1500" dirty="0"/>
           </a:p>
@@ -44147,7 +44342,7 @@
                 <a:ea typeface="Calibri" pitchFamily="34" charset="-122"/>
                 <a:cs typeface="Calibri" pitchFamily="34" charset="-120"/>
               </a:rPr>
-              <a:t>We need to reduce the amount of plastic we use to help protect the ocean.</a:t>
+              <a:t>Our school captain will introduce the new students to the rest of the class at assembly.</a:t>
             </a:r>
             <a:endParaRPr lang="en-US" sz="1500" dirty="0"/>
           </a:p>
@@ -44311,7 +44506,7 @@
                 <a:ea typeface="Calibri" pitchFamily="34" charset="-122"/>
                 <a:cs typeface="Calibri" pitchFamily="34" charset="-120"/>
               </a:rPr>
-              <a:t>At the start of the year, our teacher will introduce a new reading programme to the class.</a:t>
+              <a:t>Farmers in Australia produce many different fruits and vegetables that we eat every day.</a:t>
             </a:r>
             <a:endParaRPr lang="en-US" sz="1500" dirty="0"/>
           </a:p>
